--- a/public/fun/pack/pptx/talk/발표템플릿_46_사업제안_새벽시장.pptx
+++ b/public/fun/pack/pptx/talk/발표템플릿_46_사업제안_새벽시장.pptx
@@ -3286,6 +3286,14 @@
 <file path=ppt/slides/slide1.xml><?xml version="1.0" encoding="utf-8"?>
 <p:sld xmlns:a="http://schemas.openxmlformats.org/drawingml/2006/main" xmlns:p="http://schemas.openxmlformats.org/presentationml/2006/main" xmlns:r="http://schemas.openxmlformats.org/officeDocument/2006/relationships">
   <p:cSld>
+    <p:bg>
+      <p:bgPr>
+        <a:solidFill>
+          <a:srgbClr val="D5EEF6"/>
+        </a:solidFill>
+        <a:effectLst/>
+      </p:bgPr>
+    </p:bg>
     <p:spTree>
       <p:nvGrpSpPr>
         <p:cNvPr id="1" name=""/>
@@ -3293,30 +3301,102 @@
         <p:nvPr/>
       </p:nvGrpSpPr>
       <p:grpSpPr/>
-      <p:pic>
-        <p:nvPicPr>
-          <p:cNvPr id="3" name="표지 그림" descr="talk-46.jpg"/>
-          <p:cNvPicPr>
-            <a:picLocks noChangeAspect="1"/>
-          </p:cNvPicPr>
+      <p:sp>
+        <p:nvSpPr>
+          <p:cNvPr id="3" name="장식"/>
+          <p:cNvSpPr/>
           <p:nvPr/>
-        </p:nvPicPr>
-        <p:blipFill>
-          <a:blip r:embed="rId2"/>
-          <a:stretch>
-            <a:fillRect/>
-          </a:stretch>
-        </p:blipFill>
-        <p:spPr>
-          <a:xfrm>
-            <a:off x="0" y="0"/>
-            <a:ext cx="12191695" cy="6858000"/>
+        </p:nvSpPr>
+        <p:spPr>
+          <a:xfrm>
+            <a:off x="7071183" y="-3200400"/>
+            <a:ext cx="6400800" cy="6400800"/>
+          </a:xfrm>
+          <a:prstGeom prst="ellipse">
+            <a:avLst/>
+          </a:prstGeom>
+          <a:solidFill>
+            <a:srgbClr val="ADDBEB"/>
+          </a:solidFill>
+          <a:ln>
+            <a:noFill/>
+          </a:ln>
+        </p:spPr>
+        <p:txBody>
+          <a:bodyPr rtlCol="0" anchor="ctr"/>
+          <a:lstStyle/>
+          <a:p>
+            <a:pPr algn="ctr"/>
+          </a:p>
+        </p:txBody>
+      </p:sp>
+      <p:sp>
+        <p:nvSpPr>
+          <p:cNvPr id="4" name="장식"/>
+          <p:cNvSpPr/>
+          <p:nvPr/>
+        </p:nvSpPr>
+        <p:spPr>
+          <a:xfrm>
+            <a:off x="8534186" y="-914400"/>
+            <a:ext cx="3291840" cy="3291840"/>
+          </a:xfrm>
+          <a:prstGeom prst="ellipse">
+            <a:avLst/>
+          </a:prstGeom>
+          <a:solidFill>
+            <a:srgbClr val="FFFFFF"/>
+          </a:solidFill>
+          <a:ln>
+            <a:noFill/>
+          </a:ln>
+        </p:spPr>
+        <p:txBody>
+          <a:bodyPr rtlCol="0" anchor="ctr"/>
+          <a:lstStyle/>
+          <a:p>
+            <a:pPr algn="ctr"/>
+          </a:p>
+        </p:txBody>
+      </p:sp>
+      <p:sp>
+        <p:nvSpPr>
+          <p:cNvPr id="5" name="라벨"/>
+          <p:cNvSpPr txBox="1"/>
+          <p:nvPr/>
+        </p:nvSpPr>
+        <p:spPr>
+          <a:xfrm>
+            <a:off x="822960" y="2148840"/>
+            <a:ext cx="5608179" cy="274320"/>
           </a:xfrm>
           <a:prstGeom prst="rect">
             <a:avLst/>
           </a:prstGeom>
-        </p:spPr>
-      </p:pic>
+          <a:noFill/>
+        </p:spPr>
+        <p:txBody>
+          <a:bodyPr wrap="square" lIns="54864" rIns="54864" tIns="27432" bIns="27432" anchor="t">
+            <a:noAutofit/>
+          </a:bodyPr>
+          <a:lstStyle/>
+          <a:p>
+            <a:pPr algn="l">
+              <a:lnSpc>
+                <a:spcPct val="115000"/>
+              </a:lnSpc>
+            </a:pPr>
+            <a:r>
+              <a:rPr sz="1000" b="1" i="0" spc="250">
+                <a:solidFill>
+                  <a:srgbClr val="26231F"/>
+                </a:solidFill>
+              </a:rPr>
+              <a:t>PRESENTATION</a:t>
+            </a:r>
+          </a:p>
+        </p:txBody>
+      </p:sp>
       <p:sp>
         <p:nvSpPr>
           <p:cNvPr id="2" name="Title 1"/>
@@ -3329,8 +3409,8 @@
         </p:nvSpPr>
         <p:spPr>
           <a:xfrm>
-            <a:off x="853418" y="2057400"/>
-            <a:ext cx="6095847" cy="1554480"/>
+            <a:off x="822960" y="2606040"/>
+            <a:ext cx="5608179" cy="1188720"/>
           </a:xfrm>
         </p:spPr>
         <p:txBody>
@@ -3345,9 +3425,9 @@
               </a:lnSpc>
             </a:pPr>
             <a:r>
-              <a:rPr sz="3600" b="1" i="0">
+              <a:rPr sz="4000" b="1" i="0">
                 <a:solidFill>
-                  <a:srgbClr val="253A41"/>
+                  <a:srgbClr val="26231F"/>
                 </a:solidFill>
               </a:rPr>
               <a:t>발표 제목을 입력하세요</a:t>
@@ -3357,14 +3437,14 @@
       </p:sp>
       <p:sp>
         <p:nvSpPr>
-          <p:cNvPr id="4" name="한 줄 문구"/>
+          <p:cNvPr id="6" name="한 줄 문구"/>
           <p:cNvSpPr txBox="1"/>
           <p:nvPr/>
         </p:nvSpPr>
         <p:spPr>
           <a:xfrm>
-            <a:off x="853418" y="3749039"/>
-            <a:ext cx="6095847" cy="822960"/>
+            <a:off x="822960" y="3886200"/>
+            <a:ext cx="5608179" cy="822960"/>
           </a:xfrm>
           <a:prstGeom prst="rect">
             <a:avLst/>
@@ -3383,26 +3463,26 @@
               </a:lnSpc>
             </a:pPr>
             <a:r>
-              <a:rPr sz="1700" b="0" i="1">
+              <a:rPr sz="1700" b="0" i="0">
                 <a:solidFill>
-                  <a:srgbClr val="253A41"/>
+                  <a:srgbClr val="26231F"/>
                 </a:solidFill>
               </a:rPr>
-              <a:t>새해 첫 분기에 시작할 안입니다</a:t>
-            </a:r>
-          </a:p>
-        </p:txBody>
-      </p:sp>
-      <p:sp>
-        <p:nvSpPr>
-          <p:cNvPr id="5" name="안내 문구"/>
+              <a:t>가장 먼저 시작할 안입니다</a:t>
+            </a:r>
+          </a:p>
+        </p:txBody>
+      </p:sp>
+      <p:sp>
+        <p:nvSpPr>
+          <p:cNvPr id="7" name="안내 문구"/>
           <p:cNvSpPr txBox="1"/>
           <p:nvPr/>
         </p:nvSpPr>
         <p:spPr>
           <a:xfrm>
-            <a:off x="853418" y="4617720"/>
-            <a:ext cx="6095847" cy="914400"/>
+            <a:off x="822960" y="4754880"/>
+            <a:ext cx="5608179" cy="914400"/>
           </a:xfrm>
           <a:prstGeom prst="rect">
             <a:avLst/>
@@ -3423,7 +3503,7 @@
             <a:r>
               <a:rPr sz="1400" b="0" i="0">
                 <a:solidFill>
-                  <a:srgbClr val="666666"/>
+                  <a:srgbClr val="26231F"/>
                 </a:solidFill>
               </a:rPr>
               <a:t>사업 제안 · 발표자 이름</a:t>
@@ -3438,10 +3518,10 @@
             <a:r>
               <a:rPr sz="1400" b="0" i="0">
                 <a:solidFill>
-                  <a:srgbClr val="666666"/>
+                  <a:srgbClr val="26231F"/>
                 </a:solidFill>
               </a:rPr>
-              <a:t>2027. 00. 00</a:t>
+              <a:t>날짜 입력</a:t>
             </a:r>
           </a:p>
         </p:txBody>
@@ -3480,14 +3560,110 @@
         </p:nvSpPr>
         <p:spPr>
           <a:xfrm>
-            <a:off x="0" y="384048"/>
-            <a:ext cx="9509522" cy="896112"/>
-          </a:xfrm>
-          <a:prstGeom prst="homePlate">
+            <a:off x="0" y="6565392"/>
+            <a:ext cx="12191695" cy="292608"/>
+          </a:xfrm>
+          <a:prstGeom prst="rect">
             <a:avLst/>
           </a:prstGeom>
           <a:solidFill>
-            <a:srgbClr val="497483"/>
+            <a:srgbClr val="ADDBEB"/>
+          </a:solidFill>
+          <a:ln>
+            <a:noFill/>
+          </a:ln>
+        </p:spPr>
+        <p:txBody>
+          <a:bodyPr rtlCol="0" anchor="ctr"/>
+          <a:lstStyle/>
+          <a:p>
+            <a:pPr algn="ctr"/>
+          </a:p>
+        </p:txBody>
+      </p:sp>
+      <p:sp>
+        <p:nvSpPr>
+          <p:cNvPr id="4" name="장식"/>
+          <p:cNvSpPr/>
+          <p:nvPr/>
+        </p:nvSpPr>
+        <p:spPr>
+          <a:xfrm>
+            <a:off x="10180015" y="-1645920"/>
+            <a:ext cx="3474720" cy="3474720"/>
+          </a:xfrm>
+          <a:prstGeom prst="ellipse">
+            <a:avLst/>
+          </a:prstGeom>
+          <a:solidFill>
+            <a:srgbClr val="ADDBEB"/>
+          </a:solidFill>
+          <a:ln>
+            <a:noFill/>
+          </a:ln>
+        </p:spPr>
+        <p:txBody>
+          <a:bodyPr rtlCol="0" anchor="ctr"/>
+          <a:lstStyle/>
+          <a:p>
+            <a:pPr algn="ctr"/>
+          </a:p>
+        </p:txBody>
+      </p:sp>
+      <p:sp>
+        <p:nvSpPr>
+          <p:cNvPr id="5" name="상단 라벨"/>
+          <p:cNvSpPr txBox="1"/>
+          <p:nvPr/>
+        </p:nvSpPr>
+        <p:spPr>
+          <a:xfrm>
+            <a:off x="640080" y="274320"/>
+            <a:ext cx="5486400" cy="274320"/>
+          </a:xfrm>
+          <a:prstGeom prst="rect">
+            <a:avLst/>
+          </a:prstGeom>
+          <a:noFill/>
+        </p:spPr>
+        <p:txBody>
+          <a:bodyPr wrap="square" lIns="54864" rIns="54864" tIns="27432" bIns="27432" anchor="ctr">
+            <a:noAutofit/>
+          </a:bodyPr>
+          <a:lstStyle/>
+          <a:p>
+            <a:pPr algn="l">
+              <a:lnSpc>
+                <a:spcPct val="115000"/>
+              </a:lnSpc>
+            </a:pPr>
+            <a:r>
+              <a:rPr sz="900" b="1" i="0" spc="250">
+                <a:solidFill>
+                  <a:srgbClr val="26231F"/>
+                </a:solidFill>
+              </a:rPr>
+              <a:t>PRESENTATION</a:t>
+            </a:r>
+          </a:p>
+        </p:txBody>
+      </p:sp>
+      <p:sp>
+        <p:nvSpPr>
+          <p:cNvPr id="6" name="포인트"/>
+          <p:cNvSpPr/>
+          <p:nvPr/>
+        </p:nvSpPr>
+        <p:spPr>
+          <a:xfrm>
+            <a:off x="11048695" y="502919"/>
+            <a:ext cx="274320" cy="274320"/>
+          </a:xfrm>
+          <a:prstGeom prst="donut">
+            <a:avLst/>
+          </a:prstGeom>
+          <a:solidFill>
+            <a:srgbClr val="FFFFFF"/>
           </a:solidFill>
           <a:ln>
             <a:noFill/>
@@ -3513,8 +3689,8 @@
         </p:nvSpPr>
         <p:spPr>
           <a:xfrm>
-            <a:off x="640080" y="411480"/>
-            <a:ext cx="8412242" cy="822960"/>
+            <a:off x="640080" y="658368"/>
+            <a:ext cx="9082735" cy="868680"/>
           </a:xfrm>
         </p:spPr>
         <p:txBody>
@@ -3531,7 +3707,7 @@
             <a:r>
               <a:rPr sz="3000" b="1" i="0">
                 <a:solidFill>
-                  <a:srgbClr val="FFFFFF"/>
+                  <a:srgbClr val="26231F"/>
                 </a:solidFill>
               </a:rPr>
               <a:t>목차</a:t>
@@ -3541,26 +3717,26 @@
       </p:sp>
       <p:sp>
         <p:nvSpPr>
-          <p:cNvPr id="4" name="줄 1"/>
+          <p:cNvPr id="7" name="줄 1"/>
           <p:cNvSpPr/>
           <p:nvPr/>
         </p:nvSpPr>
         <p:spPr>
           <a:xfrm>
-            <a:off x="640080" y="1645920"/>
+            <a:off x="640080" y="1783080"/>
             <a:ext cx="10911535" cy="914400"/>
           </a:xfrm>
           <a:prstGeom prst="roundRect">
             <a:avLst>
-              <a:gd name="adj" fmla="val 8000"/>
+              <a:gd name="adj" fmla="val 3000"/>
             </a:avLst>
           </a:prstGeom>
           <a:solidFill>
-            <a:srgbClr val="F2F6F8"/>
+            <a:srgbClr val="FFFFFF"/>
           </a:solidFill>
-          <a:ln w="12700">
+          <a:ln w="9525">
             <a:solidFill>
-              <a:srgbClr val="D6E5EA"/>
+              <a:srgbClr val="D5EEF6"/>
             </a:solidFill>
           </a:ln>
         </p:spPr>
@@ -3574,20 +3750,49 @@
       </p:sp>
       <p:sp>
         <p:nvSpPr>
-          <p:cNvPr id="5" name="번호 1"/>
+          <p:cNvPr id="8" name="위쪽 띠"/>
           <p:cNvSpPr/>
           <p:nvPr/>
         </p:nvSpPr>
         <p:spPr>
           <a:xfrm>
-            <a:off x="822959" y="1874519"/>
+            <a:off x="649224" y="1792224"/>
+            <a:ext cx="10893247" cy="82296"/>
+          </a:xfrm>
+          <a:prstGeom prst="rect">
+            <a:avLst/>
+          </a:prstGeom>
+          <a:solidFill>
+            <a:srgbClr val="98CFE1"/>
+          </a:solidFill>
+          <a:ln>
+            <a:noFill/>
+          </a:ln>
+        </p:spPr>
+        <p:txBody>
+          <a:bodyPr rtlCol="0" anchor="ctr"/>
+          <a:lstStyle/>
+          <a:p>
+            <a:pPr algn="ctr"/>
+          </a:p>
+        </p:txBody>
+      </p:sp>
+      <p:sp>
+        <p:nvSpPr>
+          <p:cNvPr id="9" name="번호 1"/>
+          <p:cNvSpPr/>
+          <p:nvPr/>
+        </p:nvSpPr>
+        <p:spPr>
+          <a:xfrm>
+            <a:off x="822959" y="2011680"/>
             <a:ext cx="457200" cy="457200"/>
           </a:xfrm>
           <a:prstGeom prst="ellipse">
             <a:avLst/>
           </a:prstGeom>
           <a:solidFill>
-            <a:srgbClr val="497483"/>
+            <a:srgbClr val="B8C6EA"/>
           </a:solidFill>
           <a:ln>
             <a:noFill/>
@@ -3607,7 +3812,7 @@
             <a:r>
               <a:rPr sz="1600" b="1" i="0">
                 <a:solidFill>
-                  <a:srgbClr val="FFFFFF"/>
+                  <a:srgbClr val="26231F"/>
                 </a:solidFill>
               </a:rPr>
               <a:t>1</a:t>
@@ -3617,13 +3822,13 @@
       </p:sp>
       <p:sp>
         <p:nvSpPr>
-          <p:cNvPr id="6" name="TextBox 5"/>
+          <p:cNvPr id="10" name="TextBox 9"/>
           <p:cNvSpPr txBox="1"/>
           <p:nvPr/>
         </p:nvSpPr>
         <p:spPr>
           <a:xfrm>
-            <a:off x="1508760" y="1691640"/>
+            <a:off x="1508760" y="1828800"/>
             <a:ext cx="2743200" cy="822960"/>
           </a:xfrm>
           <a:prstGeom prst="rect">
@@ -3645,7 +3850,7 @@
             <a:r>
               <a:rPr sz="1800" b="1" i="0">
                 <a:solidFill>
-                  <a:srgbClr val="253A41"/>
+                  <a:srgbClr val="274149"/>
                 </a:solidFill>
               </a:rPr>
               <a:t>문제와 기회</a:t>
@@ -3655,13 +3860,13 @@
       </p:sp>
       <p:sp>
         <p:nvSpPr>
-          <p:cNvPr id="7" name="TextBox 6"/>
+          <p:cNvPr id="11" name="TextBox 10"/>
           <p:cNvSpPr txBox="1"/>
           <p:nvPr/>
         </p:nvSpPr>
         <p:spPr>
           <a:xfrm>
-            <a:off x="4297680" y="1691640"/>
+            <a:off x="4297680" y="1828800"/>
             <a:ext cx="7071055" cy="822960"/>
           </a:xfrm>
           <a:prstGeom prst="rect">
@@ -3683,7 +3888,7 @@
             <a:r>
               <a:rPr sz="1500" b="0" i="0">
                 <a:solidFill>
-                  <a:srgbClr val="2B2B2B"/>
+                  <a:srgbClr val="26231F"/>
                 </a:solidFill>
               </a:rPr>
               <a:t>한 줄로 내용을 적어 주세요</a:t>
@@ -3693,26 +3898,26 @@
       </p:sp>
       <p:sp>
         <p:nvSpPr>
-          <p:cNvPr id="8" name="줄 2"/>
+          <p:cNvPr id="12" name="줄 2"/>
           <p:cNvSpPr/>
           <p:nvPr/>
         </p:nvSpPr>
         <p:spPr>
           <a:xfrm>
-            <a:off x="640080" y="2697480"/>
+            <a:off x="640080" y="2834639"/>
             <a:ext cx="10911535" cy="914400"/>
           </a:xfrm>
           <a:prstGeom prst="roundRect">
             <a:avLst>
-              <a:gd name="adj" fmla="val 8000"/>
+              <a:gd name="adj" fmla="val 3000"/>
             </a:avLst>
           </a:prstGeom>
           <a:solidFill>
-            <a:srgbClr val="F2F6F8"/>
+            <a:srgbClr val="FFFFFF"/>
           </a:solidFill>
-          <a:ln w="12700">
+          <a:ln w="9525">
             <a:solidFill>
-              <a:srgbClr val="D6E5EA"/>
+              <a:srgbClr val="D5EEF6"/>
             </a:solidFill>
           </a:ln>
         </p:spPr>
@@ -3726,20 +3931,49 @@
       </p:sp>
       <p:sp>
         <p:nvSpPr>
-          <p:cNvPr id="9" name="번호 2"/>
+          <p:cNvPr id="13" name="위쪽 띠"/>
           <p:cNvSpPr/>
           <p:nvPr/>
         </p:nvSpPr>
         <p:spPr>
           <a:xfrm>
-            <a:off x="822959" y="2926080"/>
+            <a:off x="649224" y="2843783"/>
+            <a:ext cx="10893247" cy="82296"/>
+          </a:xfrm>
+          <a:prstGeom prst="rect">
+            <a:avLst/>
+          </a:prstGeom>
+          <a:solidFill>
+            <a:srgbClr val="98CFE1"/>
+          </a:solidFill>
+          <a:ln>
+            <a:noFill/>
+          </a:ln>
+        </p:spPr>
+        <p:txBody>
+          <a:bodyPr rtlCol="0" anchor="ctr"/>
+          <a:lstStyle/>
+          <a:p>
+            <a:pPr algn="ctr"/>
+          </a:p>
+        </p:txBody>
+      </p:sp>
+      <p:sp>
+        <p:nvSpPr>
+          <p:cNvPr id="14" name="번호 2"/>
+          <p:cNvSpPr/>
+          <p:nvPr/>
+        </p:nvSpPr>
+        <p:spPr>
+          <a:xfrm>
+            <a:off x="822959" y="3063239"/>
             <a:ext cx="457200" cy="457200"/>
           </a:xfrm>
           <a:prstGeom prst="ellipse">
             <a:avLst/>
           </a:prstGeom>
           <a:solidFill>
-            <a:srgbClr val="497483"/>
+            <a:srgbClr val="B8C6EA"/>
           </a:solidFill>
           <a:ln>
             <a:noFill/>
@@ -3759,7 +3993,7 @@
             <a:r>
               <a:rPr sz="1600" b="1" i="0">
                 <a:solidFill>
-                  <a:srgbClr val="FFFFFF"/>
+                  <a:srgbClr val="26231F"/>
                 </a:solidFill>
               </a:rPr>
               <a:t>2</a:t>
@@ -3769,13 +4003,13 @@
       </p:sp>
       <p:sp>
         <p:nvSpPr>
-          <p:cNvPr id="10" name="TextBox 9"/>
+          <p:cNvPr id="15" name="TextBox 14"/>
           <p:cNvSpPr txBox="1"/>
           <p:nvPr/>
         </p:nvSpPr>
         <p:spPr>
           <a:xfrm>
-            <a:off x="1508760" y="2743200"/>
+            <a:off x="1508760" y="2880359"/>
             <a:ext cx="2743200" cy="822960"/>
           </a:xfrm>
           <a:prstGeom prst="rect">
@@ -3797,7 +4031,7 @@
             <a:r>
               <a:rPr sz="1800" b="1" i="0">
                 <a:solidFill>
-                  <a:srgbClr val="253A41"/>
+                  <a:srgbClr val="274149"/>
                 </a:solidFill>
               </a:rPr>
               <a:t>해결 방법</a:t>
@@ -3807,13 +4041,13 @@
       </p:sp>
       <p:sp>
         <p:nvSpPr>
-          <p:cNvPr id="11" name="TextBox 10"/>
+          <p:cNvPr id="16" name="TextBox 15"/>
           <p:cNvSpPr txBox="1"/>
           <p:nvPr/>
         </p:nvSpPr>
         <p:spPr>
           <a:xfrm>
-            <a:off x="4297680" y="2743200"/>
+            <a:off x="4297680" y="2880359"/>
             <a:ext cx="7071055" cy="822960"/>
           </a:xfrm>
           <a:prstGeom prst="rect">
@@ -3835,7 +4069,7 @@
             <a:r>
               <a:rPr sz="1500" b="0" i="0">
                 <a:solidFill>
-                  <a:srgbClr val="2B2B2B"/>
+                  <a:srgbClr val="26231F"/>
                 </a:solidFill>
               </a:rPr>
               <a:t>한 줄로 내용을 적어 주세요</a:t>
@@ -3845,26 +4079,26 @@
       </p:sp>
       <p:sp>
         <p:nvSpPr>
-          <p:cNvPr id="12" name="줄 3"/>
+          <p:cNvPr id="17" name="줄 3"/>
           <p:cNvSpPr/>
           <p:nvPr/>
         </p:nvSpPr>
         <p:spPr>
           <a:xfrm>
-            <a:off x="640080" y="3749039"/>
+            <a:off x="640080" y="3886200"/>
             <a:ext cx="10911535" cy="914400"/>
           </a:xfrm>
           <a:prstGeom prst="roundRect">
             <a:avLst>
-              <a:gd name="adj" fmla="val 8000"/>
+              <a:gd name="adj" fmla="val 3000"/>
             </a:avLst>
           </a:prstGeom>
           <a:solidFill>
-            <a:srgbClr val="F2F6F8"/>
+            <a:srgbClr val="FFFFFF"/>
           </a:solidFill>
-          <a:ln w="12700">
+          <a:ln w="9525">
             <a:solidFill>
-              <a:srgbClr val="D6E5EA"/>
+              <a:srgbClr val="D5EEF6"/>
             </a:solidFill>
           </a:ln>
         </p:spPr>
@@ -3878,20 +4112,49 @@
       </p:sp>
       <p:sp>
         <p:nvSpPr>
-          <p:cNvPr id="13" name="번호 3"/>
+          <p:cNvPr id="18" name="위쪽 띠"/>
           <p:cNvSpPr/>
           <p:nvPr/>
         </p:nvSpPr>
         <p:spPr>
           <a:xfrm>
-            <a:off x="822959" y="3977639"/>
+            <a:off x="649224" y="3895344"/>
+            <a:ext cx="10893247" cy="82296"/>
+          </a:xfrm>
+          <a:prstGeom prst="rect">
+            <a:avLst/>
+          </a:prstGeom>
+          <a:solidFill>
+            <a:srgbClr val="98CFE1"/>
+          </a:solidFill>
+          <a:ln>
+            <a:noFill/>
+          </a:ln>
+        </p:spPr>
+        <p:txBody>
+          <a:bodyPr rtlCol="0" anchor="ctr"/>
+          <a:lstStyle/>
+          <a:p>
+            <a:pPr algn="ctr"/>
+          </a:p>
+        </p:txBody>
+      </p:sp>
+      <p:sp>
+        <p:nvSpPr>
+          <p:cNvPr id="19" name="번호 3"/>
+          <p:cNvSpPr/>
+          <p:nvPr/>
+        </p:nvSpPr>
+        <p:spPr>
+          <a:xfrm>
+            <a:off x="822959" y="4114800"/>
             <a:ext cx="457200" cy="457200"/>
           </a:xfrm>
           <a:prstGeom prst="ellipse">
             <a:avLst/>
           </a:prstGeom>
           <a:solidFill>
-            <a:srgbClr val="497483"/>
+            <a:srgbClr val="B8C6EA"/>
           </a:solidFill>
           <a:ln>
             <a:noFill/>
@@ -3911,7 +4174,7 @@
             <a:r>
               <a:rPr sz="1600" b="1" i="0">
                 <a:solidFill>
-                  <a:srgbClr val="FFFFFF"/>
+                  <a:srgbClr val="26231F"/>
                 </a:solidFill>
               </a:rPr>
               <a:t>3</a:t>
@@ -3921,13 +4184,13 @@
       </p:sp>
       <p:sp>
         <p:nvSpPr>
-          <p:cNvPr id="14" name="TextBox 13"/>
+          <p:cNvPr id="20" name="TextBox 19"/>
           <p:cNvSpPr txBox="1"/>
           <p:nvPr/>
         </p:nvSpPr>
         <p:spPr>
           <a:xfrm>
-            <a:off x="1508760" y="3794759"/>
+            <a:off x="1508760" y="3931920"/>
             <a:ext cx="2743200" cy="822960"/>
           </a:xfrm>
           <a:prstGeom prst="rect">
@@ -3949,7 +4212,7 @@
             <a:r>
               <a:rPr sz="1800" b="1" i="0">
                 <a:solidFill>
-                  <a:srgbClr val="253A41"/>
+                  <a:srgbClr val="274149"/>
                 </a:solidFill>
               </a:rPr>
               <a:t>기대 효과</a:t>
@@ -3959,13 +4222,13 @@
       </p:sp>
       <p:sp>
         <p:nvSpPr>
-          <p:cNvPr id="15" name="TextBox 14"/>
+          <p:cNvPr id="21" name="TextBox 20"/>
           <p:cNvSpPr txBox="1"/>
           <p:nvPr/>
         </p:nvSpPr>
         <p:spPr>
           <a:xfrm>
-            <a:off x="4297680" y="3794759"/>
+            <a:off x="4297680" y="3931920"/>
             <a:ext cx="7071055" cy="822960"/>
           </a:xfrm>
           <a:prstGeom prst="rect">
@@ -3987,7 +4250,7 @@
             <a:r>
               <a:rPr sz="1500" b="0" i="0">
                 <a:solidFill>
-                  <a:srgbClr val="2B2B2B"/>
+                  <a:srgbClr val="26231F"/>
                 </a:solidFill>
               </a:rPr>
               <a:t>한 줄로 내용을 적어 주세요</a:t>
@@ -3997,26 +4260,26 @@
       </p:sp>
       <p:sp>
         <p:nvSpPr>
-          <p:cNvPr id="16" name="줄 4"/>
+          <p:cNvPr id="22" name="줄 4"/>
           <p:cNvSpPr/>
           <p:nvPr/>
         </p:nvSpPr>
         <p:spPr>
           <a:xfrm>
-            <a:off x="640080" y="4800600"/>
+            <a:off x="640080" y="4937759"/>
             <a:ext cx="10911535" cy="914400"/>
           </a:xfrm>
           <a:prstGeom prst="roundRect">
             <a:avLst>
-              <a:gd name="adj" fmla="val 8000"/>
+              <a:gd name="adj" fmla="val 3000"/>
             </a:avLst>
           </a:prstGeom>
           <a:solidFill>
-            <a:srgbClr val="F2F6F8"/>
+            <a:srgbClr val="FFFFFF"/>
           </a:solidFill>
-          <a:ln w="12700">
+          <a:ln w="9525">
             <a:solidFill>
-              <a:srgbClr val="D6E5EA"/>
+              <a:srgbClr val="D5EEF6"/>
             </a:solidFill>
           </a:ln>
         </p:spPr>
@@ -4030,20 +4293,49 @@
       </p:sp>
       <p:sp>
         <p:nvSpPr>
-          <p:cNvPr id="17" name="번호 4"/>
+          <p:cNvPr id="23" name="위쪽 띠"/>
           <p:cNvSpPr/>
           <p:nvPr/>
         </p:nvSpPr>
         <p:spPr>
           <a:xfrm>
-            <a:off x="822959" y="5029200"/>
+            <a:off x="649224" y="4946903"/>
+            <a:ext cx="10893247" cy="82296"/>
+          </a:xfrm>
+          <a:prstGeom prst="rect">
+            <a:avLst/>
+          </a:prstGeom>
+          <a:solidFill>
+            <a:srgbClr val="98CFE1"/>
+          </a:solidFill>
+          <a:ln>
+            <a:noFill/>
+          </a:ln>
+        </p:spPr>
+        <p:txBody>
+          <a:bodyPr rtlCol="0" anchor="ctr"/>
+          <a:lstStyle/>
+          <a:p>
+            <a:pPr algn="ctr"/>
+          </a:p>
+        </p:txBody>
+      </p:sp>
+      <p:sp>
+        <p:nvSpPr>
+          <p:cNvPr id="24" name="번호 4"/>
+          <p:cNvSpPr/>
+          <p:nvPr/>
+        </p:nvSpPr>
+        <p:spPr>
+          <a:xfrm>
+            <a:off x="822959" y="5166359"/>
             <a:ext cx="457200" cy="457200"/>
           </a:xfrm>
           <a:prstGeom prst="ellipse">
             <a:avLst/>
           </a:prstGeom>
           <a:solidFill>
-            <a:srgbClr val="497483"/>
+            <a:srgbClr val="B8C6EA"/>
           </a:solidFill>
           <a:ln>
             <a:noFill/>
@@ -4063,7 +4355,7 @@
             <a:r>
               <a:rPr sz="1600" b="1" i="0">
                 <a:solidFill>
-                  <a:srgbClr val="FFFFFF"/>
+                  <a:srgbClr val="26231F"/>
                 </a:solidFill>
               </a:rPr>
               <a:t>4</a:t>
@@ -4073,13 +4365,13 @@
       </p:sp>
       <p:sp>
         <p:nvSpPr>
-          <p:cNvPr id="18" name="TextBox 17"/>
+          <p:cNvPr id="25" name="TextBox 24"/>
           <p:cNvSpPr txBox="1"/>
           <p:nvPr/>
         </p:nvSpPr>
         <p:spPr>
           <a:xfrm>
-            <a:off x="1508760" y="4846320"/>
+            <a:off x="1508760" y="4983479"/>
             <a:ext cx="2743200" cy="822960"/>
           </a:xfrm>
           <a:prstGeom prst="rect">
@@ -4101,7 +4393,7 @@
             <a:r>
               <a:rPr sz="1800" b="1" i="0">
                 <a:solidFill>
-                  <a:srgbClr val="253A41"/>
+                  <a:srgbClr val="274149"/>
                 </a:solidFill>
               </a:rPr>
               <a:t>진행 계획</a:t>
@@ -4111,13 +4403,13 @@
       </p:sp>
       <p:sp>
         <p:nvSpPr>
-          <p:cNvPr id="19" name="TextBox 18"/>
+          <p:cNvPr id="26" name="TextBox 25"/>
           <p:cNvSpPr txBox="1"/>
           <p:nvPr/>
         </p:nvSpPr>
         <p:spPr>
           <a:xfrm>
-            <a:off x="4297680" y="4846320"/>
+            <a:off x="4297680" y="4983479"/>
             <a:ext cx="7071055" cy="822960"/>
           </a:xfrm>
           <a:prstGeom prst="rect">
@@ -4139,7 +4431,7 @@
             <a:r>
               <a:rPr sz="1500" b="0" i="0">
                 <a:solidFill>
-                  <a:srgbClr val="2B2B2B"/>
+                  <a:srgbClr val="26231F"/>
                 </a:solidFill>
               </a:rPr>
               <a:t>한 줄로 내용을 적어 주세요</a:t>
@@ -4181,14 +4473,110 @@
         </p:nvSpPr>
         <p:spPr>
           <a:xfrm>
-            <a:off x="0" y="384048"/>
-            <a:ext cx="9509522" cy="896112"/>
-          </a:xfrm>
-          <a:prstGeom prst="homePlate">
+            <a:off x="0" y="6565392"/>
+            <a:ext cx="12191695" cy="292608"/>
+          </a:xfrm>
+          <a:prstGeom prst="rect">
             <a:avLst/>
           </a:prstGeom>
           <a:solidFill>
-            <a:srgbClr val="497483"/>
+            <a:srgbClr val="ADDBEB"/>
+          </a:solidFill>
+          <a:ln>
+            <a:noFill/>
+          </a:ln>
+        </p:spPr>
+        <p:txBody>
+          <a:bodyPr rtlCol="0" anchor="ctr"/>
+          <a:lstStyle/>
+          <a:p>
+            <a:pPr algn="ctr"/>
+          </a:p>
+        </p:txBody>
+      </p:sp>
+      <p:sp>
+        <p:nvSpPr>
+          <p:cNvPr id="4" name="장식"/>
+          <p:cNvSpPr/>
+          <p:nvPr/>
+        </p:nvSpPr>
+        <p:spPr>
+          <a:xfrm>
+            <a:off x="10180015" y="-1645920"/>
+            <a:ext cx="3474720" cy="3474720"/>
+          </a:xfrm>
+          <a:prstGeom prst="ellipse">
+            <a:avLst/>
+          </a:prstGeom>
+          <a:solidFill>
+            <a:srgbClr val="ADDBEB"/>
+          </a:solidFill>
+          <a:ln>
+            <a:noFill/>
+          </a:ln>
+        </p:spPr>
+        <p:txBody>
+          <a:bodyPr rtlCol="0" anchor="ctr"/>
+          <a:lstStyle/>
+          <a:p>
+            <a:pPr algn="ctr"/>
+          </a:p>
+        </p:txBody>
+      </p:sp>
+      <p:sp>
+        <p:nvSpPr>
+          <p:cNvPr id="5" name="상단 라벨"/>
+          <p:cNvSpPr txBox="1"/>
+          <p:nvPr/>
+        </p:nvSpPr>
+        <p:spPr>
+          <a:xfrm>
+            <a:off x="640080" y="274320"/>
+            <a:ext cx="5486400" cy="274320"/>
+          </a:xfrm>
+          <a:prstGeom prst="rect">
+            <a:avLst/>
+          </a:prstGeom>
+          <a:noFill/>
+        </p:spPr>
+        <p:txBody>
+          <a:bodyPr wrap="square" lIns="54864" rIns="54864" tIns="27432" bIns="27432" anchor="ctr">
+            <a:noAutofit/>
+          </a:bodyPr>
+          <a:lstStyle/>
+          <a:p>
+            <a:pPr algn="l">
+              <a:lnSpc>
+                <a:spcPct val="115000"/>
+              </a:lnSpc>
+            </a:pPr>
+            <a:r>
+              <a:rPr sz="900" b="1" i="0" spc="250">
+                <a:solidFill>
+                  <a:srgbClr val="26231F"/>
+                </a:solidFill>
+              </a:rPr>
+              <a:t>PRESENTATION</a:t>
+            </a:r>
+          </a:p>
+        </p:txBody>
+      </p:sp>
+      <p:sp>
+        <p:nvSpPr>
+          <p:cNvPr id="6" name="포인트"/>
+          <p:cNvSpPr/>
+          <p:nvPr/>
+        </p:nvSpPr>
+        <p:spPr>
+          <a:xfrm>
+            <a:off x="11048695" y="502919"/>
+            <a:ext cx="274320" cy="274320"/>
+          </a:xfrm>
+          <a:prstGeom prst="donut">
+            <a:avLst/>
+          </a:prstGeom>
+          <a:solidFill>
+            <a:srgbClr val="FFFFFF"/>
           </a:solidFill>
           <a:ln>
             <a:noFill/>
@@ -4214,8 +4602,8 @@
         </p:nvSpPr>
         <p:spPr>
           <a:xfrm>
-            <a:off x="640080" y="411480"/>
-            <a:ext cx="8412242" cy="822960"/>
+            <a:off x="640080" y="658368"/>
+            <a:ext cx="9082735" cy="868680"/>
           </a:xfrm>
         </p:spPr>
         <p:txBody>
@@ -4232,7 +4620,7 @@
             <a:r>
               <a:rPr sz="3000" b="1" i="0">
                 <a:solidFill>
-                  <a:srgbClr val="FFFFFF"/>
+                  <a:srgbClr val="26231F"/>
                 </a:solidFill>
               </a:rPr>
               <a:t>핵심 메시지</a:t>
@@ -4242,13 +4630,13 @@
       </p:sp>
       <p:sp>
         <p:nvSpPr>
-          <p:cNvPr id="4" name="핵심 문장"/>
+          <p:cNvPr id="7" name="핵심 문장"/>
           <p:cNvSpPr txBox="1"/>
           <p:nvPr/>
         </p:nvSpPr>
         <p:spPr>
           <a:xfrm>
-            <a:off x="640080" y="1645920"/>
+            <a:off x="640080" y="1783080"/>
             <a:ext cx="10911535" cy="1188720"/>
           </a:xfrm>
           <a:prstGeom prst="rect">
@@ -4270,7 +4658,7 @@
             <a:r>
               <a:rPr sz="2600" b="1" i="0">
                 <a:solidFill>
-                  <a:srgbClr val="253A41"/>
+                  <a:srgbClr val="274149"/>
                 </a:solidFill>
               </a:rPr>
               <a:t>한 문장으로 말하면 — 여기에 핵심 메시지를 입력하세요</a:t>
@@ -4280,26 +4668,26 @@
       </p:sp>
       <p:sp>
         <p:nvSpPr>
-          <p:cNvPr id="5" name="카드 1"/>
+          <p:cNvPr id="8" name="카드 1"/>
           <p:cNvSpPr/>
           <p:nvPr/>
         </p:nvSpPr>
         <p:spPr>
           <a:xfrm>
-            <a:off x="640080" y="3108960"/>
+            <a:off x="640080" y="3246120"/>
             <a:ext cx="3484778" cy="3017520"/>
           </a:xfrm>
           <a:prstGeom prst="roundRect">
             <a:avLst>
-              <a:gd name="adj" fmla="val 8000"/>
+              <a:gd name="adj" fmla="val 3000"/>
             </a:avLst>
           </a:prstGeom>
           <a:solidFill>
-            <a:srgbClr val="F2F6F8"/>
+            <a:srgbClr val="FFFFFF"/>
           </a:solidFill>
-          <a:ln w="15875">
+          <a:ln w="9525">
             <a:solidFill>
-              <a:srgbClr val="D6E5EA"/>
+              <a:srgbClr val="D5EEF6"/>
             </a:solidFill>
           </a:ln>
         </p:spPr>
@@ -4313,20 +4701,49 @@
       </p:sp>
       <p:sp>
         <p:nvSpPr>
-          <p:cNvPr id="6" name="번호 1"/>
+          <p:cNvPr id="9" name="위쪽 띠"/>
           <p:cNvSpPr/>
           <p:nvPr/>
         </p:nvSpPr>
         <p:spPr>
           <a:xfrm>
-            <a:off x="822959" y="3291840"/>
+            <a:off x="649224" y="3255263"/>
+            <a:ext cx="3466490" cy="82296"/>
+          </a:xfrm>
+          <a:prstGeom prst="rect">
+            <a:avLst/>
+          </a:prstGeom>
+          <a:solidFill>
+            <a:srgbClr val="98CFE1"/>
+          </a:solidFill>
+          <a:ln>
+            <a:noFill/>
+          </a:ln>
+        </p:spPr>
+        <p:txBody>
+          <a:bodyPr rtlCol="0" anchor="ctr"/>
+          <a:lstStyle/>
+          <a:p>
+            <a:pPr algn="ctr"/>
+          </a:p>
+        </p:txBody>
+      </p:sp>
+      <p:sp>
+        <p:nvSpPr>
+          <p:cNvPr id="10" name="번호 1"/>
+          <p:cNvSpPr/>
+          <p:nvPr/>
+        </p:nvSpPr>
+        <p:spPr>
+          <a:xfrm>
+            <a:off x="822959" y="3429000"/>
             <a:ext cx="457200" cy="457200"/>
           </a:xfrm>
           <a:prstGeom prst="ellipse">
             <a:avLst/>
           </a:prstGeom>
           <a:solidFill>
-            <a:srgbClr val="497483"/>
+            <a:srgbClr val="B8C6EA"/>
           </a:solidFill>
           <a:ln>
             <a:noFill/>
@@ -4346,7 +4763,7 @@
             <a:r>
               <a:rPr sz="1600" b="1" i="0">
                 <a:solidFill>
-                  <a:srgbClr val="FFFFFF"/>
+                  <a:srgbClr val="26231F"/>
                 </a:solidFill>
               </a:rPr>
               <a:t>1</a:t>
@@ -4356,13 +4773,13 @@
       </p:sp>
       <p:sp>
         <p:nvSpPr>
-          <p:cNvPr id="7" name="TextBox 6"/>
+          <p:cNvPr id="11" name="TextBox 10"/>
           <p:cNvSpPr txBox="1"/>
           <p:nvPr/>
         </p:nvSpPr>
         <p:spPr>
           <a:xfrm>
-            <a:off x="777240" y="3886200"/>
+            <a:off x="777240" y="4023360"/>
             <a:ext cx="3210458" cy="640080"/>
           </a:xfrm>
           <a:prstGeom prst="rect">
@@ -4384,7 +4801,7 @@
             <a:r>
               <a:rPr sz="1800" b="1" i="0">
                 <a:solidFill>
-                  <a:srgbClr val="253A41"/>
+                  <a:srgbClr val="274149"/>
                 </a:solidFill>
               </a:rPr>
               <a:t>현황</a:t>
@@ -4394,13 +4811,13 @@
       </p:sp>
       <p:sp>
         <p:nvSpPr>
-          <p:cNvPr id="8" name="TextBox 7"/>
+          <p:cNvPr id="12" name="TextBox 11"/>
           <p:cNvSpPr txBox="1"/>
           <p:nvPr/>
         </p:nvSpPr>
         <p:spPr>
           <a:xfrm>
-            <a:off x="777240" y="4572000"/>
+            <a:off x="777240" y="4709160"/>
             <a:ext cx="3210458" cy="1417319"/>
           </a:xfrm>
           <a:prstGeom prst="rect">
@@ -4422,7 +4839,7 @@
             <a:r>
               <a:rPr sz="1600" b="0" i="0">
                 <a:solidFill>
-                  <a:srgbClr val="2B2B2B"/>
+                  <a:srgbClr val="26231F"/>
                 </a:solidFill>
               </a:rPr>
               <a:t>내용을 입력하세요</a:t>
@@ -4437,7 +4854,7 @@
             <a:r>
               <a:rPr sz="1600" b="0" i="0">
                 <a:solidFill>
-                  <a:srgbClr val="2B2B2B"/>
+                  <a:srgbClr val="26231F"/>
                 </a:solidFill>
               </a:rPr>
               <a:t>내용을 입력하세요</a:t>
@@ -4447,26 +4864,26 @@
       </p:sp>
       <p:sp>
         <p:nvSpPr>
-          <p:cNvPr id="9" name="카드 2"/>
+          <p:cNvPr id="13" name="카드 2"/>
           <p:cNvSpPr/>
           <p:nvPr/>
         </p:nvSpPr>
         <p:spPr>
           <a:xfrm>
-            <a:off x="4353458" y="3108960"/>
+            <a:off x="4353458" y="3246120"/>
             <a:ext cx="3484778" cy="3017520"/>
           </a:xfrm>
           <a:prstGeom prst="roundRect">
             <a:avLst>
-              <a:gd name="adj" fmla="val 8000"/>
+              <a:gd name="adj" fmla="val 3000"/>
             </a:avLst>
           </a:prstGeom>
           <a:solidFill>
-            <a:srgbClr val="F2F6F8"/>
+            <a:srgbClr val="FFFFFF"/>
           </a:solidFill>
-          <a:ln w="15875">
+          <a:ln w="9525">
             <a:solidFill>
-              <a:srgbClr val="D6E5EA"/>
+              <a:srgbClr val="D5EEF6"/>
             </a:solidFill>
           </a:ln>
         </p:spPr>
@@ -4480,20 +4897,49 @@
       </p:sp>
       <p:sp>
         <p:nvSpPr>
-          <p:cNvPr id="10" name="번호 2"/>
+          <p:cNvPr id="14" name="위쪽 띠"/>
           <p:cNvSpPr/>
           <p:nvPr/>
         </p:nvSpPr>
         <p:spPr>
           <a:xfrm>
-            <a:off x="4536338" y="3291840"/>
+            <a:off x="4362602" y="3255263"/>
+            <a:ext cx="3466490" cy="82296"/>
+          </a:xfrm>
+          <a:prstGeom prst="rect">
+            <a:avLst/>
+          </a:prstGeom>
+          <a:solidFill>
+            <a:srgbClr val="98CFE1"/>
+          </a:solidFill>
+          <a:ln>
+            <a:noFill/>
+          </a:ln>
+        </p:spPr>
+        <p:txBody>
+          <a:bodyPr rtlCol="0" anchor="ctr"/>
+          <a:lstStyle/>
+          <a:p>
+            <a:pPr algn="ctr"/>
+          </a:p>
+        </p:txBody>
+      </p:sp>
+      <p:sp>
+        <p:nvSpPr>
+          <p:cNvPr id="15" name="번호 2"/>
+          <p:cNvSpPr/>
+          <p:nvPr/>
+        </p:nvSpPr>
+        <p:spPr>
+          <a:xfrm>
+            <a:off x="4536338" y="3429000"/>
             <a:ext cx="457200" cy="457200"/>
           </a:xfrm>
           <a:prstGeom prst="ellipse">
             <a:avLst/>
           </a:prstGeom>
           <a:solidFill>
-            <a:srgbClr val="497483"/>
+            <a:srgbClr val="B8C6EA"/>
           </a:solidFill>
           <a:ln>
             <a:noFill/>
@@ -4513,7 +4959,7 @@
             <a:r>
               <a:rPr sz="1600" b="1" i="0">
                 <a:solidFill>
-                  <a:srgbClr val="FFFFFF"/>
+                  <a:srgbClr val="26231F"/>
                 </a:solidFill>
               </a:rPr>
               <a:t>2</a:t>
@@ -4523,13 +4969,13 @@
       </p:sp>
       <p:sp>
         <p:nvSpPr>
-          <p:cNvPr id="11" name="TextBox 10"/>
+          <p:cNvPr id="16" name="TextBox 15"/>
           <p:cNvSpPr txBox="1"/>
           <p:nvPr/>
         </p:nvSpPr>
         <p:spPr>
           <a:xfrm>
-            <a:off x="4490618" y="3886200"/>
+            <a:off x="4490618" y="4023360"/>
             <a:ext cx="3210458" cy="640080"/>
           </a:xfrm>
           <a:prstGeom prst="rect">
@@ -4551,7 +4997,7 @@
             <a:r>
               <a:rPr sz="1800" b="1" i="0">
                 <a:solidFill>
-                  <a:srgbClr val="253A41"/>
+                  <a:srgbClr val="274149"/>
                 </a:solidFill>
               </a:rPr>
               <a:t>제안</a:t>
@@ -4561,13 +5007,13 @@
       </p:sp>
       <p:sp>
         <p:nvSpPr>
-          <p:cNvPr id="12" name="TextBox 11"/>
+          <p:cNvPr id="17" name="TextBox 16"/>
           <p:cNvSpPr txBox="1"/>
           <p:nvPr/>
         </p:nvSpPr>
         <p:spPr>
           <a:xfrm>
-            <a:off x="4490618" y="4572000"/>
+            <a:off x="4490618" y="4709160"/>
             <a:ext cx="3210458" cy="1417319"/>
           </a:xfrm>
           <a:prstGeom prst="rect">
@@ -4589,7 +5035,7 @@
             <a:r>
               <a:rPr sz="1600" b="0" i="0">
                 <a:solidFill>
-                  <a:srgbClr val="2B2B2B"/>
+                  <a:srgbClr val="26231F"/>
                 </a:solidFill>
               </a:rPr>
               <a:t>내용을 입력하세요</a:t>
@@ -4604,7 +5050,7 @@
             <a:r>
               <a:rPr sz="1600" b="0" i="0">
                 <a:solidFill>
-                  <a:srgbClr val="2B2B2B"/>
+                  <a:srgbClr val="26231F"/>
                 </a:solidFill>
               </a:rPr>
               <a:t>내용을 입력하세요</a:t>
@@ -4614,26 +5060,26 @@
       </p:sp>
       <p:sp>
         <p:nvSpPr>
-          <p:cNvPr id="13" name="카드 3"/>
+          <p:cNvPr id="18" name="카드 3"/>
           <p:cNvSpPr/>
           <p:nvPr/>
         </p:nvSpPr>
         <p:spPr>
           <a:xfrm>
-            <a:off x="8066836" y="3108960"/>
+            <a:off x="8066836" y="3246120"/>
             <a:ext cx="3484778" cy="3017520"/>
           </a:xfrm>
           <a:prstGeom prst="roundRect">
             <a:avLst>
-              <a:gd name="adj" fmla="val 8000"/>
+              <a:gd name="adj" fmla="val 3000"/>
             </a:avLst>
           </a:prstGeom>
           <a:solidFill>
-            <a:srgbClr val="F2F6F8"/>
+            <a:srgbClr val="FFFFFF"/>
           </a:solidFill>
-          <a:ln w="15875">
+          <a:ln w="9525">
             <a:solidFill>
-              <a:srgbClr val="D6E5EA"/>
+              <a:srgbClr val="D5EEF6"/>
             </a:solidFill>
           </a:ln>
         </p:spPr>
@@ -4647,20 +5093,49 @@
       </p:sp>
       <p:sp>
         <p:nvSpPr>
-          <p:cNvPr id="14" name="번호 3"/>
+          <p:cNvPr id="19" name="위쪽 띠"/>
           <p:cNvSpPr/>
           <p:nvPr/>
         </p:nvSpPr>
         <p:spPr>
           <a:xfrm>
-            <a:off x="8249716" y="3291840"/>
+            <a:off x="8075980" y="3255263"/>
+            <a:ext cx="3466490" cy="82296"/>
+          </a:xfrm>
+          <a:prstGeom prst="rect">
+            <a:avLst/>
+          </a:prstGeom>
+          <a:solidFill>
+            <a:srgbClr val="98CFE1"/>
+          </a:solidFill>
+          <a:ln>
+            <a:noFill/>
+          </a:ln>
+        </p:spPr>
+        <p:txBody>
+          <a:bodyPr rtlCol="0" anchor="ctr"/>
+          <a:lstStyle/>
+          <a:p>
+            <a:pPr algn="ctr"/>
+          </a:p>
+        </p:txBody>
+      </p:sp>
+      <p:sp>
+        <p:nvSpPr>
+          <p:cNvPr id="20" name="번호 3"/>
+          <p:cNvSpPr/>
+          <p:nvPr/>
+        </p:nvSpPr>
+        <p:spPr>
+          <a:xfrm>
+            <a:off x="8249716" y="3429000"/>
             <a:ext cx="457200" cy="457200"/>
           </a:xfrm>
           <a:prstGeom prst="ellipse">
             <a:avLst/>
           </a:prstGeom>
           <a:solidFill>
-            <a:srgbClr val="497483"/>
+            <a:srgbClr val="B8C6EA"/>
           </a:solidFill>
           <a:ln>
             <a:noFill/>
@@ -4680,7 +5155,7 @@
             <a:r>
               <a:rPr sz="1600" b="1" i="0">
                 <a:solidFill>
-                  <a:srgbClr val="FFFFFF"/>
+                  <a:srgbClr val="26231F"/>
                 </a:solidFill>
               </a:rPr>
               <a:t>3</a:t>
@@ -4690,13 +5165,13 @@
       </p:sp>
       <p:sp>
         <p:nvSpPr>
-          <p:cNvPr id="15" name="TextBox 14"/>
+          <p:cNvPr id="21" name="TextBox 20"/>
           <p:cNvSpPr txBox="1"/>
           <p:nvPr/>
         </p:nvSpPr>
         <p:spPr>
           <a:xfrm>
-            <a:off x="8203996" y="3886200"/>
+            <a:off x="8203996" y="4023360"/>
             <a:ext cx="3210458" cy="640080"/>
           </a:xfrm>
           <a:prstGeom prst="rect">
@@ -4718,7 +5193,7 @@
             <a:r>
               <a:rPr sz="1800" b="1" i="0">
                 <a:solidFill>
-                  <a:srgbClr val="253A41"/>
+                  <a:srgbClr val="274149"/>
                 </a:solidFill>
               </a:rPr>
               <a:t>효과</a:t>
@@ -4728,13 +5203,13 @@
       </p:sp>
       <p:sp>
         <p:nvSpPr>
-          <p:cNvPr id="16" name="TextBox 15"/>
+          <p:cNvPr id="22" name="TextBox 21"/>
           <p:cNvSpPr txBox="1"/>
           <p:nvPr/>
         </p:nvSpPr>
         <p:spPr>
           <a:xfrm>
-            <a:off x="8203996" y="4572000"/>
+            <a:off x="8203996" y="4709160"/>
             <a:ext cx="3210458" cy="1417319"/>
           </a:xfrm>
           <a:prstGeom prst="rect">
@@ -4756,7 +5231,7 @@
             <a:r>
               <a:rPr sz="1600" b="0" i="0">
                 <a:solidFill>
-                  <a:srgbClr val="2B2B2B"/>
+                  <a:srgbClr val="26231F"/>
                 </a:solidFill>
               </a:rPr>
               <a:t>내용을 입력하세요</a:t>
@@ -4771,7 +5246,7 @@
             <a:r>
               <a:rPr sz="1600" b="0" i="0">
                 <a:solidFill>
-                  <a:srgbClr val="2B2B2B"/>
+                  <a:srgbClr val="26231F"/>
                 </a:solidFill>
               </a:rPr>
               <a:t>내용을 입력하세요</a:t>
@@ -4813,14 +5288,110 @@
         </p:nvSpPr>
         <p:spPr>
           <a:xfrm>
-            <a:off x="0" y="384048"/>
-            <a:ext cx="9509522" cy="896112"/>
-          </a:xfrm>
-          <a:prstGeom prst="homePlate">
+            <a:off x="0" y="6565392"/>
+            <a:ext cx="12191695" cy="292608"/>
+          </a:xfrm>
+          <a:prstGeom prst="rect">
             <a:avLst/>
           </a:prstGeom>
           <a:solidFill>
-            <a:srgbClr val="497483"/>
+            <a:srgbClr val="ADDBEB"/>
+          </a:solidFill>
+          <a:ln>
+            <a:noFill/>
+          </a:ln>
+        </p:spPr>
+        <p:txBody>
+          <a:bodyPr rtlCol="0" anchor="ctr"/>
+          <a:lstStyle/>
+          <a:p>
+            <a:pPr algn="ctr"/>
+          </a:p>
+        </p:txBody>
+      </p:sp>
+      <p:sp>
+        <p:nvSpPr>
+          <p:cNvPr id="4" name="장식"/>
+          <p:cNvSpPr/>
+          <p:nvPr/>
+        </p:nvSpPr>
+        <p:spPr>
+          <a:xfrm>
+            <a:off x="10180015" y="-1645920"/>
+            <a:ext cx="3474720" cy="3474720"/>
+          </a:xfrm>
+          <a:prstGeom prst="ellipse">
+            <a:avLst/>
+          </a:prstGeom>
+          <a:solidFill>
+            <a:srgbClr val="ADDBEB"/>
+          </a:solidFill>
+          <a:ln>
+            <a:noFill/>
+          </a:ln>
+        </p:spPr>
+        <p:txBody>
+          <a:bodyPr rtlCol="0" anchor="ctr"/>
+          <a:lstStyle/>
+          <a:p>
+            <a:pPr algn="ctr"/>
+          </a:p>
+        </p:txBody>
+      </p:sp>
+      <p:sp>
+        <p:nvSpPr>
+          <p:cNvPr id="5" name="상단 라벨"/>
+          <p:cNvSpPr txBox="1"/>
+          <p:nvPr/>
+        </p:nvSpPr>
+        <p:spPr>
+          <a:xfrm>
+            <a:off x="640080" y="274320"/>
+            <a:ext cx="5486400" cy="274320"/>
+          </a:xfrm>
+          <a:prstGeom prst="rect">
+            <a:avLst/>
+          </a:prstGeom>
+          <a:noFill/>
+        </p:spPr>
+        <p:txBody>
+          <a:bodyPr wrap="square" lIns="54864" rIns="54864" tIns="27432" bIns="27432" anchor="ctr">
+            <a:noAutofit/>
+          </a:bodyPr>
+          <a:lstStyle/>
+          <a:p>
+            <a:pPr algn="l">
+              <a:lnSpc>
+                <a:spcPct val="115000"/>
+              </a:lnSpc>
+            </a:pPr>
+            <a:r>
+              <a:rPr sz="900" b="1" i="0" spc="250">
+                <a:solidFill>
+                  <a:srgbClr val="26231F"/>
+                </a:solidFill>
+              </a:rPr>
+              <a:t>PRESENTATION</a:t>
+            </a:r>
+          </a:p>
+        </p:txBody>
+      </p:sp>
+      <p:sp>
+        <p:nvSpPr>
+          <p:cNvPr id="6" name="포인트"/>
+          <p:cNvSpPr/>
+          <p:nvPr/>
+        </p:nvSpPr>
+        <p:spPr>
+          <a:xfrm>
+            <a:off x="11048695" y="502919"/>
+            <a:ext cx="274320" cy="274320"/>
+          </a:xfrm>
+          <a:prstGeom prst="donut">
+            <a:avLst/>
+          </a:prstGeom>
+          <a:solidFill>
+            <a:srgbClr val="FFFFFF"/>
           </a:solidFill>
           <a:ln>
             <a:noFill/>
@@ -4846,8 +5417,8 @@
         </p:nvSpPr>
         <p:spPr>
           <a:xfrm>
-            <a:off x="640080" y="411480"/>
-            <a:ext cx="8412242" cy="822960"/>
+            <a:off x="640080" y="658368"/>
+            <a:ext cx="9082735" cy="868680"/>
           </a:xfrm>
         </p:spPr>
         <p:txBody>
@@ -4864,7 +5435,7 @@
             <a:r>
               <a:rPr sz="3000" b="1" i="0">
                 <a:solidFill>
-                  <a:srgbClr val="FFFFFF"/>
+                  <a:srgbClr val="26231F"/>
                 </a:solidFill>
               </a:rPr>
               <a:t>한눈에 비교</a:t>
@@ -4874,26 +5445,26 @@
       </p:sp>
       <p:sp>
         <p:nvSpPr>
-          <p:cNvPr id="4" name="왼쪽 칸"/>
+          <p:cNvPr id="7" name="왼쪽 칸"/>
           <p:cNvSpPr/>
           <p:nvPr/>
         </p:nvSpPr>
         <p:spPr>
           <a:xfrm>
-            <a:off x="640080" y="1645920"/>
-            <a:ext cx="5272887" cy="4754880"/>
+            <a:off x="640080" y="1783080"/>
+            <a:ext cx="5272887" cy="3291840"/>
           </a:xfrm>
           <a:prstGeom prst="roundRect">
             <a:avLst>
-              <a:gd name="adj" fmla="val 8000"/>
+              <a:gd name="adj" fmla="val 3000"/>
             </a:avLst>
           </a:prstGeom>
           <a:solidFill>
-            <a:srgbClr val="F2F6F8"/>
+            <a:srgbClr val="FFFFFF"/>
           </a:solidFill>
-          <a:ln w="12700">
+          <a:ln w="9525">
             <a:solidFill>
-              <a:srgbClr val="D6E5EA"/>
+              <a:srgbClr val="D5EEF6"/>
             </a:solidFill>
           </a:ln>
         </p:spPr>
@@ -4907,13 +5478,42 @@
       </p:sp>
       <p:sp>
         <p:nvSpPr>
-          <p:cNvPr id="5" name="칸 제목 바"/>
+          <p:cNvPr id="8" name="위쪽 띠"/>
           <p:cNvSpPr/>
           <p:nvPr/>
         </p:nvSpPr>
         <p:spPr>
           <a:xfrm>
-            <a:off x="640080" y="1645920"/>
+            <a:off x="649224" y="1792224"/>
+            <a:ext cx="5254599" cy="82296"/>
+          </a:xfrm>
+          <a:prstGeom prst="rect">
+            <a:avLst/>
+          </a:prstGeom>
+          <a:solidFill>
+            <a:srgbClr val="98CFE1"/>
+          </a:solidFill>
+          <a:ln>
+            <a:noFill/>
+          </a:ln>
+        </p:spPr>
+        <p:txBody>
+          <a:bodyPr rtlCol="0" anchor="ctr"/>
+          <a:lstStyle/>
+          <a:p>
+            <a:pPr algn="ctr"/>
+          </a:p>
+        </p:txBody>
+      </p:sp>
+      <p:sp>
+        <p:nvSpPr>
+          <p:cNvPr id="9" name="칸 제목 바"/>
+          <p:cNvSpPr/>
+          <p:nvPr/>
+        </p:nvSpPr>
+        <p:spPr>
+          <a:xfrm>
+            <a:off x="640080" y="1783080"/>
             <a:ext cx="5272887" cy="640080"/>
           </a:xfrm>
           <a:prstGeom prst="roundRect">
@@ -4922,7 +5522,7 @@
             </a:avLst>
           </a:prstGeom>
           <a:solidFill>
-            <a:srgbClr val="497483"/>
+            <a:srgbClr val="98CFE1"/>
           </a:solidFill>
           <a:ln>
             <a:noFill/>
@@ -4938,13 +5538,13 @@
       </p:sp>
       <p:sp>
         <p:nvSpPr>
-          <p:cNvPr id="6" name="TextBox 5"/>
+          <p:cNvPr id="10" name="TextBox 9"/>
           <p:cNvSpPr txBox="1"/>
           <p:nvPr/>
         </p:nvSpPr>
         <p:spPr>
           <a:xfrm>
-            <a:off x="822959" y="1645920"/>
+            <a:off x="822959" y="1783080"/>
             <a:ext cx="4907127" cy="640080"/>
           </a:xfrm>
           <a:prstGeom prst="rect">
@@ -4966,7 +5566,7 @@
             <a:r>
               <a:rPr sz="1800" b="1" i="0">
                 <a:solidFill>
-                  <a:srgbClr val="FFFFFF"/>
+                  <a:srgbClr val="26231F"/>
                 </a:solidFill>
               </a:rPr>
               <a:t>현재</a:t>
@@ -4976,14 +5576,14 @@
       </p:sp>
       <p:sp>
         <p:nvSpPr>
-          <p:cNvPr id="7" name="TextBox 6"/>
+          <p:cNvPr id="11" name="TextBox 10"/>
           <p:cNvSpPr txBox="1"/>
           <p:nvPr/>
         </p:nvSpPr>
         <p:spPr>
           <a:xfrm>
-            <a:off x="868680" y="2468880"/>
-            <a:ext cx="4815687" cy="3840480"/>
+            <a:off x="868680" y="2606040"/>
+            <a:ext cx="4815687" cy="2377440"/>
           </a:xfrm>
           <a:prstGeom prst="rect">
             <a:avLst/>
@@ -5009,7 +5609,7 @@
             <a:r>
               <a:rPr sz="1500" b="0" i="0">
                 <a:solidFill>
-                  <a:srgbClr val="2B2B2B"/>
+                  <a:srgbClr val="26231F"/>
                 </a:solidFill>
               </a:rPr>
               <a:t>내용을 입력하세요</a:t>
@@ -5029,7 +5629,7 @@
             <a:r>
               <a:rPr sz="1500" b="0" i="0">
                 <a:solidFill>
-                  <a:srgbClr val="2B2B2B"/>
+                  <a:srgbClr val="26231F"/>
                 </a:solidFill>
               </a:rPr>
               <a:t>내용을 입력하세요</a:t>
@@ -5049,7 +5649,7 @@
             <a:r>
               <a:rPr sz="1500" b="0" i="0">
                 <a:solidFill>
-                  <a:srgbClr val="2B2B2B"/>
+                  <a:srgbClr val="26231F"/>
                 </a:solidFill>
               </a:rPr>
               <a:t>내용을 입력하세요</a:t>
@@ -5059,26 +5659,26 @@
       </p:sp>
       <p:sp>
         <p:nvSpPr>
-          <p:cNvPr id="8" name="오른쪽 칸"/>
+          <p:cNvPr id="12" name="오른쪽 칸"/>
           <p:cNvSpPr/>
           <p:nvPr/>
         </p:nvSpPr>
         <p:spPr>
           <a:xfrm>
-            <a:off x="6278727" y="1645920"/>
-            <a:ext cx="5272887" cy="4754880"/>
+            <a:off x="6278727" y="1783080"/>
+            <a:ext cx="5272887" cy="3291840"/>
           </a:xfrm>
           <a:prstGeom prst="roundRect">
             <a:avLst>
-              <a:gd name="adj" fmla="val 8000"/>
+              <a:gd name="adj" fmla="val 3000"/>
             </a:avLst>
           </a:prstGeom>
           <a:solidFill>
-            <a:srgbClr val="D6E5EA"/>
+            <a:srgbClr val="FFFFFF"/>
           </a:solidFill>
-          <a:ln w="12700">
+          <a:ln w="9525">
             <a:solidFill>
-              <a:srgbClr val="D6E5EA"/>
+              <a:srgbClr val="D5EEF6"/>
             </a:solidFill>
           </a:ln>
         </p:spPr>
@@ -5092,13 +5692,42 @@
       </p:sp>
       <p:sp>
         <p:nvSpPr>
-          <p:cNvPr id="9" name="칸 제목 바"/>
+          <p:cNvPr id="13" name="위쪽 띠"/>
           <p:cNvSpPr/>
           <p:nvPr/>
         </p:nvSpPr>
         <p:spPr>
           <a:xfrm>
-            <a:off x="6278727" y="1645920"/>
+            <a:off x="6287871" y="1792224"/>
+            <a:ext cx="5254599" cy="82296"/>
+          </a:xfrm>
+          <a:prstGeom prst="rect">
+            <a:avLst/>
+          </a:prstGeom>
+          <a:solidFill>
+            <a:srgbClr val="98CFE1"/>
+          </a:solidFill>
+          <a:ln>
+            <a:noFill/>
+          </a:ln>
+        </p:spPr>
+        <p:txBody>
+          <a:bodyPr rtlCol="0" anchor="ctr"/>
+          <a:lstStyle/>
+          <a:p>
+            <a:pPr algn="ctr"/>
+          </a:p>
+        </p:txBody>
+      </p:sp>
+      <p:sp>
+        <p:nvSpPr>
+          <p:cNvPr id="14" name="칸 제목 바"/>
+          <p:cNvSpPr/>
+          <p:nvPr/>
+        </p:nvSpPr>
+        <p:spPr>
+          <a:xfrm>
+            <a:off x="6278727" y="1783080"/>
             <a:ext cx="5272887" cy="640080"/>
           </a:xfrm>
           <a:prstGeom prst="roundRect">
@@ -5107,7 +5736,7 @@
             </a:avLst>
           </a:prstGeom>
           <a:solidFill>
-            <a:srgbClr val="253A41"/>
+            <a:srgbClr val="274149"/>
           </a:solidFill>
           <a:ln>
             <a:noFill/>
@@ -5123,13 +5752,13 @@
       </p:sp>
       <p:sp>
         <p:nvSpPr>
-          <p:cNvPr id="10" name="TextBox 9"/>
+          <p:cNvPr id="15" name="TextBox 14"/>
           <p:cNvSpPr txBox="1"/>
           <p:nvPr/>
         </p:nvSpPr>
         <p:spPr>
           <a:xfrm>
-            <a:off x="6461607" y="1645920"/>
+            <a:off x="6461607" y="1783080"/>
             <a:ext cx="4907127" cy="640080"/>
           </a:xfrm>
           <a:prstGeom prst="rect">
@@ -5161,14 +5790,14 @@
       </p:sp>
       <p:sp>
         <p:nvSpPr>
-          <p:cNvPr id="11" name="TextBox 10"/>
+          <p:cNvPr id="16" name="TextBox 15"/>
           <p:cNvSpPr txBox="1"/>
           <p:nvPr/>
         </p:nvSpPr>
         <p:spPr>
           <a:xfrm>
-            <a:off x="6507327" y="2468880"/>
-            <a:ext cx="4815687" cy="3840480"/>
+            <a:off x="6507327" y="2606040"/>
+            <a:ext cx="4815687" cy="2377440"/>
           </a:xfrm>
           <a:prstGeom prst="rect">
             <a:avLst/>
@@ -5194,7 +5823,7 @@
             <a:r>
               <a:rPr sz="1500" b="0" i="0">
                 <a:solidFill>
-                  <a:srgbClr val="2B2B2B"/>
+                  <a:srgbClr val="26231F"/>
                 </a:solidFill>
               </a:rPr>
               <a:t>내용을 입력하세요</a:t>
@@ -5214,7 +5843,7 @@
             <a:r>
               <a:rPr sz="1500" b="0" i="0">
                 <a:solidFill>
-                  <a:srgbClr val="2B2B2B"/>
+                  <a:srgbClr val="26231F"/>
                 </a:solidFill>
               </a:rPr>
               <a:t>내용을 입력하세요</a:t>
@@ -5234,7 +5863,7 @@
             <a:r>
               <a:rPr sz="1500" b="0" i="0">
                 <a:solidFill>
-                  <a:srgbClr val="2B2B2B"/>
+                  <a:srgbClr val="26231F"/>
                 </a:solidFill>
               </a:rPr>
               <a:t>내용을 입력하세요</a:t>
@@ -5276,14 +5905,110 @@
         </p:nvSpPr>
         <p:spPr>
           <a:xfrm>
-            <a:off x="0" y="384048"/>
-            <a:ext cx="9509522" cy="896112"/>
-          </a:xfrm>
-          <a:prstGeom prst="homePlate">
+            <a:off x="0" y="6565392"/>
+            <a:ext cx="12191695" cy="292608"/>
+          </a:xfrm>
+          <a:prstGeom prst="rect">
             <a:avLst/>
           </a:prstGeom>
           <a:solidFill>
-            <a:srgbClr val="497483"/>
+            <a:srgbClr val="ADDBEB"/>
+          </a:solidFill>
+          <a:ln>
+            <a:noFill/>
+          </a:ln>
+        </p:spPr>
+        <p:txBody>
+          <a:bodyPr rtlCol="0" anchor="ctr"/>
+          <a:lstStyle/>
+          <a:p>
+            <a:pPr algn="ctr"/>
+          </a:p>
+        </p:txBody>
+      </p:sp>
+      <p:sp>
+        <p:nvSpPr>
+          <p:cNvPr id="4" name="장식"/>
+          <p:cNvSpPr/>
+          <p:nvPr/>
+        </p:nvSpPr>
+        <p:spPr>
+          <a:xfrm>
+            <a:off x="10180015" y="-1645920"/>
+            <a:ext cx="3474720" cy="3474720"/>
+          </a:xfrm>
+          <a:prstGeom prst="ellipse">
+            <a:avLst/>
+          </a:prstGeom>
+          <a:solidFill>
+            <a:srgbClr val="ADDBEB"/>
+          </a:solidFill>
+          <a:ln>
+            <a:noFill/>
+          </a:ln>
+        </p:spPr>
+        <p:txBody>
+          <a:bodyPr rtlCol="0" anchor="ctr"/>
+          <a:lstStyle/>
+          <a:p>
+            <a:pPr algn="ctr"/>
+          </a:p>
+        </p:txBody>
+      </p:sp>
+      <p:sp>
+        <p:nvSpPr>
+          <p:cNvPr id="5" name="상단 라벨"/>
+          <p:cNvSpPr txBox="1"/>
+          <p:nvPr/>
+        </p:nvSpPr>
+        <p:spPr>
+          <a:xfrm>
+            <a:off x="640080" y="274320"/>
+            <a:ext cx="5486400" cy="274320"/>
+          </a:xfrm>
+          <a:prstGeom prst="rect">
+            <a:avLst/>
+          </a:prstGeom>
+          <a:noFill/>
+        </p:spPr>
+        <p:txBody>
+          <a:bodyPr wrap="square" lIns="54864" rIns="54864" tIns="27432" bIns="27432" anchor="ctr">
+            <a:noAutofit/>
+          </a:bodyPr>
+          <a:lstStyle/>
+          <a:p>
+            <a:pPr algn="l">
+              <a:lnSpc>
+                <a:spcPct val="115000"/>
+              </a:lnSpc>
+            </a:pPr>
+            <a:r>
+              <a:rPr sz="900" b="1" i="0" spc="250">
+                <a:solidFill>
+                  <a:srgbClr val="26231F"/>
+                </a:solidFill>
+              </a:rPr>
+              <a:t>PRESENTATION</a:t>
+            </a:r>
+          </a:p>
+        </p:txBody>
+      </p:sp>
+      <p:sp>
+        <p:nvSpPr>
+          <p:cNvPr id="6" name="포인트"/>
+          <p:cNvSpPr/>
+          <p:nvPr/>
+        </p:nvSpPr>
+        <p:spPr>
+          <a:xfrm>
+            <a:off x="11048695" y="502919"/>
+            <a:ext cx="274320" cy="274320"/>
+          </a:xfrm>
+          <a:prstGeom prst="donut">
+            <a:avLst/>
+          </a:prstGeom>
+          <a:solidFill>
+            <a:srgbClr val="FFFFFF"/>
           </a:solidFill>
           <a:ln>
             <a:noFill/>
@@ -5309,8 +6034,8 @@
         </p:nvSpPr>
         <p:spPr>
           <a:xfrm>
-            <a:off x="640080" y="411480"/>
-            <a:ext cx="8412242" cy="822960"/>
+            <a:off x="640080" y="658368"/>
+            <a:ext cx="9082735" cy="868680"/>
           </a:xfrm>
         </p:spPr>
         <p:txBody>
@@ -5327,7 +6052,7 @@
             <a:r>
               <a:rPr sz="3000" b="1" i="0">
                 <a:solidFill>
-                  <a:srgbClr val="FFFFFF"/>
+                  <a:srgbClr val="26231F"/>
                 </a:solidFill>
               </a:rPr>
               <a:t>일정·현황</a:t>
@@ -5337,14 +6062,14 @@
       </p:sp>
       <p:graphicFrame>
         <p:nvGraphicFramePr>
-          <p:cNvPr id="4" name="표"/>
+          <p:cNvPr id="7" name="표"/>
           <p:cNvGraphicFramePr>
             <a:graphicFrameLocks noGrp="1"/>
           </p:cNvGraphicFramePr>
           <p:nvPr/>
         </p:nvGraphicFramePr>
         <p:xfrm>
-          <a:off x="640080" y="1645920"/>
+          <a:off x="640080" y="1783080"/>
           <a:ext cx="10911532" cy="3840480"/>
         </p:xfrm>
         <a:graphic>
@@ -5369,7 +6094,7 @@
                       <a:r>
                         <a:rPr sz="1500" b="1">
                           <a:solidFill>
-                            <a:srgbClr val="FFFFFF"/>
+                            <a:srgbClr val="26231F"/>
                           </a:solidFill>
                         </a:rPr>
                         <a:t>단계</a:t>
@@ -5379,30 +6104,30 @@
                   <a:tcPr anchor="ctr" marL="73152" marR="73152">
                     <a:lnL w="9525" cap="flat" cmpd="sng" algn="ctr">
                       <a:solidFill>
-                        <a:srgbClr val="497483"/>
+                        <a:srgbClr val="98CFE1"/>
                       </a:solidFill>
                       <a:prstDash val="solid"/>
                     </a:lnL>
                     <a:lnR w="9525" cap="flat" cmpd="sng" algn="ctr">
                       <a:solidFill>
-                        <a:srgbClr val="497483"/>
+                        <a:srgbClr val="98CFE1"/>
                       </a:solidFill>
                       <a:prstDash val="solid"/>
                     </a:lnR>
                     <a:lnT w="9525" cap="flat" cmpd="sng" algn="ctr">
                       <a:solidFill>
-                        <a:srgbClr val="497483"/>
+                        <a:srgbClr val="98CFE1"/>
                       </a:solidFill>
                       <a:prstDash val="solid"/>
                     </a:lnT>
                     <a:lnB w="9525" cap="flat" cmpd="sng" algn="ctr">
                       <a:solidFill>
-                        <a:srgbClr val="497483"/>
+                        <a:srgbClr val="98CFE1"/>
                       </a:solidFill>
                       <a:prstDash val="solid"/>
                     </a:lnB>
                     <a:solidFill>
-                      <a:srgbClr val="497483"/>
+                      <a:srgbClr val="98CFE1"/>
                     </a:solidFill>
                   </a:tcPr>
                 </a:tc>
@@ -5415,7 +6140,7 @@
                       <a:r>
                         <a:rPr sz="1500" b="1">
                           <a:solidFill>
-                            <a:srgbClr val="FFFFFF"/>
+                            <a:srgbClr val="26231F"/>
                           </a:solidFill>
                         </a:rPr>
                         <a:t>내용</a:t>
@@ -5425,30 +6150,30 @@
                   <a:tcPr anchor="ctr" marL="73152" marR="73152">
                     <a:lnL w="9525" cap="flat" cmpd="sng" algn="ctr">
                       <a:solidFill>
-                        <a:srgbClr val="497483"/>
+                        <a:srgbClr val="98CFE1"/>
                       </a:solidFill>
                       <a:prstDash val="solid"/>
                     </a:lnL>
                     <a:lnR w="9525" cap="flat" cmpd="sng" algn="ctr">
                       <a:solidFill>
-                        <a:srgbClr val="497483"/>
+                        <a:srgbClr val="98CFE1"/>
                       </a:solidFill>
                       <a:prstDash val="solid"/>
                     </a:lnR>
                     <a:lnT w="9525" cap="flat" cmpd="sng" algn="ctr">
                       <a:solidFill>
-                        <a:srgbClr val="497483"/>
+                        <a:srgbClr val="98CFE1"/>
                       </a:solidFill>
                       <a:prstDash val="solid"/>
                     </a:lnT>
                     <a:lnB w="9525" cap="flat" cmpd="sng" algn="ctr">
                       <a:solidFill>
-                        <a:srgbClr val="497483"/>
+                        <a:srgbClr val="98CFE1"/>
                       </a:solidFill>
                       <a:prstDash val="solid"/>
                     </a:lnB>
                     <a:solidFill>
-                      <a:srgbClr val="497483"/>
+                      <a:srgbClr val="98CFE1"/>
                     </a:solidFill>
                   </a:tcPr>
                 </a:tc>
@@ -5461,7 +6186,7 @@
                       <a:r>
                         <a:rPr sz="1500" b="1">
                           <a:solidFill>
-                            <a:srgbClr val="FFFFFF"/>
+                            <a:srgbClr val="26231F"/>
                           </a:solidFill>
                         </a:rPr>
                         <a:t>기간</a:t>
@@ -5471,30 +6196,30 @@
                   <a:tcPr anchor="ctr" marL="73152" marR="73152">
                     <a:lnL w="9525" cap="flat" cmpd="sng" algn="ctr">
                       <a:solidFill>
-                        <a:srgbClr val="497483"/>
+                        <a:srgbClr val="98CFE1"/>
                       </a:solidFill>
                       <a:prstDash val="solid"/>
                     </a:lnL>
                     <a:lnR w="9525" cap="flat" cmpd="sng" algn="ctr">
                       <a:solidFill>
-                        <a:srgbClr val="497483"/>
+                        <a:srgbClr val="98CFE1"/>
                       </a:solidFill>
                       <a:prstDash val="solid"/>
                     </a:lnR>
                     <a:lnT w="9525" cap="flat" cmpd="sng" algn="ctr">
                       <a:solidFill>
-                        <a:srgbClr val="497483"/>
+                        <a:srgbClr val="98CFE1"/>
                       </a:solidFill>
                       <a:prstDash val="solid"/>
                     </a:lnT>
                     <a:lnB w="9525" cap="flat" cmpd="sng" algn="ctr">
                       <a:solidFill>
-                        <a:srgbClr val="497483"/>
+                        <a:srgbClr val="98CFE1"/>
                       </a:solidFill>
                       <a:prstDash val="solid"/>
                     </a:lnB>
                     <a:solidFill>
-                      <a:srgbClr val="497483"/>
+                      <a:srgbClr val="98CFE1"/>
                     </a:solidFill>
                   </a:tcPr>
                 </a:tc>
@@ -5507,7 +6232,7 @@
                       <a:r>
                         <a:rPr sz="1500" b="1">
                           <a:solidFill>
-                            <a:srgbClr val="FFFFFF"/>
+                            <a:srgbClr val="26231F"/>
                           </a:solidFill>
                         </a:rPr>
                         <a:t>담당</a:t>
@@ -5517,30 +6242,30 @@
                   <a:tcPr anchor="ctr" marL="73152" marR="73152">
                     <a:lnL w="9525" cap="flat" cmpd="sng" algn="ctr">
                       <a:solidFill>
-                        <a:srgbClr val="497483"/>
+                        <a:srgbClr val="98CFE1"/>
                       </a:solidFill>
                       <a:prstDash val="solid"/>
                     </a:lnL>
                     <a:lnR w="9525" cap="flat" cmpd="sng" algn="ctr">
                       <a:solidFill>
-                        <a:srgbClr val="497483"/>
+                        <a:srgbClr val="98CFE1"/>
                       </a:solidFill>
                       <a:prstDash val="solid"/>
                     </a:lnR>
                     <a:lnT w="9525" cap="flat" cmpd="sng" algn="ctr">
                       <a:solidFill>
-                        <a:srgbClr val="497483"/>
+                        <a:srgbClr val="98CFE1"/>
                       </a:solidFill>
                       <a:prstDash val="solid"/>
                     </a:lnT>
                     <a:lnB w="9525" cap="flat" cmpd="sng" algn="ctr">
                       <a:solidFill>
-                        <a:srgbClr val="497483"/>
+                        <a:srgbClr val="98CFE1"/>
                       </a:solidFill>
                       <a:prstDash val="solid"/>
                     </a:lnB>
                     <a:solidFill>
-                      <a:srgbClr val="497483"/>
+                      <a:srgbClr val="98CFE1"/>
                     </a:solidFill>
                   </a:tcPr>
                 </a:tc>
@@ -5555,7 +6280,7 @@
                       <a:r>
                         <a:rPr sz="1500" b="1">
                           <a:solidFill>
-                            <a:srgbClr val="253A41"/>
+                            <a:srgbClr val="274149"/>
                           </a:solidFill>
                         </a:rPr>
                         <a:t>1</a:t>
@@ -5565,30 +6290,30 @@
                   <a:tcPr anchor="ctr" marL="73152" marR="73152">
                     <a:lnL w="9525" cap="flat" cmpd="sng" algn="ctr">
                       <a:solidFill>
-                        <a:srgbClr val="D6E5EA"/>
+                        <a:srgbClr val="D5EEF6"/>
                       </a:solidFill>
                       <a:prstDash val="solid"/>
                     </a:lnL>
                     <a:lnR w="9525" cap="flat" cmpd="sng" algn="ctr">
                       <a:solidFill>
-                        <a:srgbClr val="D6E5EA"/>
+                        <a:srgbClr val="D5EEF6"/>
                       </a:solidFill>
                       <a:prstDash val="solid"/>
                     </a:lnR>
                     <a:lnT w="9525" cap="flat" cmpd="sng" algn="ctr">
                       <a:solidFill>
-                        <a:srgbClr val="D6E5EA"/>
+                        <a:srgbClr val="D5EEF6"/>
                       </a:solidFill>
                       <a:prstDash val="solid"/>
                     </a:lnT>
                     <a:lnB w="9525" cap="flat" cmpd="sng" algn="ctr">
                       <a:solidFill>
-                        <a:srgbClr val="D6E5EA"/>
+                        <a:srgbClr val="D5EEF6"/>
                       </a:solidFill>
                       <a:prstDash val="solid"/>
                     </a:lnB>
                     <a:solidFill>
-                      <a:srgbClr val="D6E5EA"/>
+                      <a:srgbClr val="D5EEF6"/>
                     </a:solidFill>
                   </a:tcPr>
                 </a:tc>
@@ -5601,7 +6326,7 @@
                       <a:r>
                         <a:rPr sz="1500" b="0">
                           <a:solidFill>
-                            <a:srgbClr val="2B2B2B"/>
+                            <a:srgbClr val="26231F"/>
                           </a:solidFill>
                         </a:rPr>
                         <a:t>내용 입력</a:t>
@@ -5611,25 +6336,25 @@
                   <a:tcPr anchor="ctr" marL="73152" marR="73152">
                     <a:lnL w="9525" cap="flat" cmpd="sng" algn="ctr">
                       <a:solidFill>
-                        <a:srgbClr val="D6E5EA"/>
+                        <a:srgbClr val="D5EEF6"/>
                       </a:solidFill>
                       <a:prstDash val="solid"/>
                     </a:lnL>
                     <a:lnR w="9525" cap="flat" cmpd="sng" algn="ctr">
                       <a:solidFill>
-                        <a:srgbClr val="D6E5EA"/>
+                        <a:srgbClr val="D5EEF6"/>
                       </a:solidFill>
                       <a:prstDash val="solid"/>
                     </a:lnR>
                     <a:lnT w="9525" cap="flat" cmpd="sng" algn="ctr">
                       <a:solidFill>
-                        <a:srgbClr val="D6E5EA"/>
+                        <a:srgbClr val="D5EEF6"/>
                       </a:solidFill>
                       <a:prstDash val="solid"/>
                     </a:lnT>
                     <a:lnB w="9525" cap="flat" cmpd="sng" algn="ctr">
                       <a:solidFill>
-                        <a:srgbClr val="D6E5EA"/>
+                        <a:srgbClr val="D5EEF6"/>
                       </a:solidFill>
                       <a:prstDash val="solid"/>
                     </a:lnB>
@@ -5647,7 +6372,7 @@
                       <a:r>
                         <a:rPr sz="1500" b="0">
                           <a:solidFill>
-                            <a:srgbClr val="2B2B2B"/>
+                            <a:srgbClr val="26231F"/>
                           </a:solidFill>
                         </a:rPr>
                         <a:t/>
@@ -5657,25 +6382,25 @@
                   <a:tcPr anchor="ctr" marL="73152" marR="73152">
                     <a:lnL w="9525" cap="flat" cmpd="sng" algn="ctr">
                       <a:solidFill>
-                        <a:srgbClr val="D6E5EA"/>
+                        <a:srgbClr val="D5EEF6"/>
                       </a:solidFill>
                       <a:prstDash val="solid"/>
                     </a:lnL>
                     <a:lnR w="9525" cap="flat" cmpd="sng" algn="ctr">
                       <a:solidFill>
-                        <a:srgbClr val="D6E5EA"/>
+                        <a:srgbClr val="D5EEF6"/>
                       </a:solidFill>
                       <a:prstDash val="solid"/>
                     </a:lnR>
                     <a:lnT w="9525" cap="flat" cmpd="sng" algn="ctr">
                       <a:solidFill>
-                        <a:srgbClr val="D6E5EA"/>
+                        <a:srgbClr val="D5EEF6"/>
                       </a:solidFill>
                       <a:prstDash val="solid"/>
                     </a:lnT>
                     <a:lnB w="9525" cap="flat" cmpd="sng" algn="ctr">
                       <a:solidFill>
-                        <a:srgbClr val="D6E5EA"/>
+                        <a:srgbClr val="D5EEF6"/>
                       </a:solidFill>
                       <a:prstDash val="solid"/>
                     </a:lnB>
@@ -5693,7 +6418,7 @@
                       <a:r>
                         <a:rPr sz="1500" b="0">
                           <a:solidFill>
-                            <a:srgbClr val="2B2B2B"/>
+                            <a:srgbClr val="26231F"/>
                           </a:solidFill>
                         </a:rPr>
                         <a:t/>
@@ -5703,25 +6428,25 @@
                   <a:tcPr anchor="ctr" marL="73152" marR="73152">
                     <a:lnL w="9525" cap="flat" cmpd="sng" algn="ctr">
                       <a:solidFill>
-                        <a:srgbClr val="D6E5EA"/>
+                        <a:srgbClr val="D5EEF6"/>
                       </a:solidFill>
                       <a:prstDash val="solid"/>
                     </a:lnL>
                     <a:lnR w="9525" cap="flat" cmpd="sng" algn="ctr">
                       <a:solidFill>
-                        <a:srgbClr val="D6E5EA"/>
+                        <a:srgbClr val="D5EEF6"/>
                       </a:solidFill>
                       <a:prstDash val="solid"/>
                     </a:lnR>
                     <a:lnT w="9525" cap="flat" cmpd="sng" algn="ctr">
                       <a:solidFill>
-                        <a:srgbClr val="D6E5EA"/>
+                        <a:srgbClr val="D5EEF6"/>
                       </a:solidFill>
                       <a:prstDash val="solid"/>
                     </a:lnT>
                     <a:lnB w="9525" cap="flat" cmpd="sng" algn="ctr">
                       <a:solidFill>
-                        <a:srgbClr val="D6E5EA"/>
+                        <a:srgbClr val="D5EEF6"/>
                       </a:solidFill>
                       <a:prstDash val="solid"/>
                     </a:lnB>
@@ -5741,7 +6466,7 @@
                       <a:r>
                         <a:rPr sz="1500" b="1">
                           <a:solidFill>
-                            <a:srgbClr val="253A41"/>
+                            <a:srgbClr val="274149"/>
                           </a:solidFill>
                         </a:rPr>
                         <a:t>2</a:t>
@@ -5751,30 +6476,30 @@
                   <a:tcPr anchor="ctr" marL="73152" marR="73152">
                     <a:lnL w="9525" cap="flat" cmpd="sng" algn="ctr">
                       <a:solidFill>
-                        <a:srgbClr val="D6E5EA"/>
+                        <a:srgbClr val="D5EEF6"/>
                       </a:solidFill>
                       <a:prstDash val="solid"/>
                     </a:lnL>
                     <a:lnR w="9525" cap="flat" cmpd="sng" algn="ctr">
                       <a:solidFill>
-                        <a:srgbClr val="D6E5EA"/>
+                        <a:srgbClr val="D5EEF6"/>
                       </a:solidFill>
                       <a:prstDash val="solid"/>
                     </a:lnR>
                     <a:lnT w="9525" cap="flat" cmpd="sng" algn="ctr">
                       <a:solidFill>
-                        <a:srgbClr val="D6E5EA"/>
+                        <a:srgbClr val="D5EEF6"/>
                       </a:solidFill>
                       <a:prstDash val="solid"/>
                     </a:lnT>
                     <a:lnB w="9525" cap="flat" cmpd="sng" algn="ctr">
                       <a:solidFill>
-                        <a:srgbClr val="D6E5EA"/>
+                        <a:srgbClr val="D5EEF6"/>
                       </a:solidFill>
                       <a:prstDash val="solid"/>
                     </a:lnB>
                     <a:solidFill>
-                      <a:srgbClr val="D6E5EA"/>
+                      <a:srgbClr val="D5EEF6"/>
                     </a:solidFill>
                   </a:tcPr>
                 </a:tc>
@@ -5787,7 +6512,7 @@
                       <a:r>
                         <a:rPr sz="1500" b="0">
                           <a:solidFill>
-                            <a:srgbClr val="2B2B2B"/>
+                            <a:srgbClr val="26231F"/>
                           </a:solidFill>
                         </a:rPr>
                         <a:t>내용 입력</a:t>
@@ -5797,30 +6522,30 @@
                   <a:tcPr anchor="ctr" marL="73152" marR="73152">
                     <a:lnL w="9525" cap="flat" cmpd="sng" algn="ctr">
                       <a:solidFill>
-                        <a:srgbClr val="D6E5EA"/>
+                        <a:srgbClr val="D5EEF6"/>
                       </a:solidFill>
                       <a:prstDash val="solid"/>
                     </a:lnL>
                     <a:lnR w="9525" cap="flat" cmpd="sng" algn="ctr">
                       <a:solidFill>
-                        <a:srgbClr val="D6E5EA"/>
+                        <a:srgbClr val="D5EEF6"/>
                       </a:solidFill>
                       <a:prstDash val="solid"/>
                     </a:lnR>
                     <a:lnT w="9525" cap="flat" cmpd="sng" algn="ctr">
                       <a:solidFill>
-                        <a:srgbClr val="D6E5EA"/>
+                        <a:srgbClr val="D5EEF6"/>
                       </a:solidFill>
                       <a:prstDash val="solid"/>
                     </a:lnT>
                     <a:lnB w="9525" cap="flat" cmpd="sng" algn="ctr">
                       <a:solidFill>
-                        <a:srgbClr val="D6E5EA"/>
+                        <a:srgbClr val="D5EEF6"/>
                       </a:solidFill>
                       <a:prstDash val="solid"/>
                     </a:lnB>
                     <a:solidFill>
-                      <a:srgbClr val="F2F6F8"/>
+                      <a:srgbClr val="ECF7FB"/>
                     </a:solidFill>
                   </a:tcPr>
                 </a:tc>
@@ -5833,7 +6558,7 @@
                       <a:r>
                         <a:rPr sz="1500" b="0">
                           <a:solidFill>
-                            <a:srgbClr val="2B2B2B"/>
+                            <a:srgbClr val="26231F"/>
                           </a:solidFill>
                         </a:rPr>
                         <a:t/>
@@ -5843,30 +6568,30 @@
                   <a:tcPr anchor="ctr" marL="73152" marR="73152">
                     <a:lnL w="9525" cap="flat" cmpd="sng" algn="ctr">
                       <a:solidFill>
-                        <a:srgbClr val="D6E5EA"/>
+                        <a:srgbClr val="D5EEF6"/>
                       </a:solidFill>
                       <a:prstDash val="solid"/>
                     </a:lnL>
                     <a:lnR w="9525" cap="flat" cmpd="sng" algn="ctr">
                       <a:solidFill>
-                        <a:srgbClr val="D6E5EA"/>
+                        <a:srgbClr val="D5EEF6"/>
                       </a:solidFill>
                       <a:prstDash val="solid"/>
                     </a:lnR>
                     <a:lnT w="9525" cap="flat" cmpd="sng" algn="ctr">
                       <a:solidFill>
-                        <a:srgbClr val="D6E5EA"/>
+                        <a:srgbClr val="D5EEF6"/>
                       </a:solidFill>
                       <a:prstDash val="solid"/>
                     </a:lnT>
                     <a:lnB w="9525" cap="flat" cmpd="sng" algn="ctr">
                       <a:solidFill>
-                        <a:srgbClr val="D6E5EA"/>
+                        <a:srgbClr val="D5EEF6"/>
                       </a:solidFill>
                       <a:prstDash val="solid"/>
                     </a:lnB>
                     <a:solidFill>
-                      <a:srgbClr val="F2F6F8"/>
+                      <a:srgbClr val="ECF7FB"/>
                     </a:solidFill>
                   </a:tcPr>
                 </a:tc>
@@ -5879,7 +6604,7 @@
                       <a:r>
                         <a:rPr sz="1500" b="0">
                           <a:solidFill>
-                            <a:srgbClr val="2B2B2B"/>
+                            <a:srgbClr val="26231F"/>
                           </a:solidFill>
                         </a:rPr>
                         <a:t/>
@@ -5889,30 +6614,30 @@
                   <a:tcPr anchor="ctr" marL="73152" marR="73152">
                     <a:lnL w="9525" cap="flat" cmpd="sng" algn="ctr">
                       <a:solidFill>
-                        <a:srgbClr val="D6E5EA"/>
+                        <a:srgbClr val="D5EEF6"/>
                       </a:solidFill>
                       <a:prstDash val="solid"/>
                     </a:lnL>
                     <a:lnR w="9525" cap="flat" cmpd="sng" algn="ctr">
                       <a:solidFill>
-                        <a:srgbClr val="D6E5EA"/>
+                        <a:srgbClr val="D5EEF6"/>
                       </a:solidFill>
                       <a:prstDash val="solid"/>
                     </a:lnR>
                     <a:lnT w="9525" cap="flat" cmpd="sng" algn="ctr">
                       <a:solidFill>
-                        <a:srgbClr val="D6E5EA"/>
+                        <a:srgbClr val="D5EEF6"/>
                       </a:solidFill>
                       <a:prstDash val="solid"/>
                     </a:lnT>
                     <a:lnB w="9525" cap="flat" cmpd="sng" algn="ctr">
                       <a:solidFill>
-                        <a:srgbClr val="D6E5EA"/>
+                        <a:srgbClr val="D5EEF6"/>
                       </a:solidFill>
                       <a:prstDash val="solid"/>
                     </a:lnB>
                     <a:solidFill>
-                      <a:srgbClr val="F2F6F8"/>
+                      <a:srgbClr val="ECF7FB"/>
                     </a:solidFill>
                   </a:tcPr>
                 </a:tc>
@@ -5927,7 +6652,7 @@
                       <a:r>
                         <a:rPr sz="1500" b="1">
                           <a:solidFill>
-                            <a:srgbClr val="253A41"/>
+                            <a:srgbClr val="274149"/>
                           </a:solidFill>
                         </a:rPr>
                         <a:t>3</a:t>
@@ -5937,30 +6662,30 @@
                   <a:tcPr anchor="ctr" marL="73152" marR="73152">
                     <a:lnL w="9525" cap="flat" cmpd="sng" algn="ctr">
                       <a:solidFill>
-                        <a:srgbClr val="D6E5EA"/>
+                        <a:srgbClr val="D5EEF6"/>
                       </a:solidFill>
                       <a:prstDash val="solid"/>
                     </a:lnL>
                     <a:lnR w="9525" cap="flat" cmpd="sng" algn="ctr">
                       <a:solidFill>
-                        <a:srgbClr val="D6E5EA"/>
+                        <a:srgbClr val="D5EEF6"/>
                       </a:solidFill>
                       <a:prstDash val="solid"/>
                     </a:lnR>
                     <a:lnT w="9525" cap="flat" cmpd="sng" algn="ctr">
                       <a:solidFill>
-                        <a:srgbClr val="D6E5EA"/>
+                        <a:srgbClr val="D5EEF6"/>
                       </a:solidFill>
                       <a:prstDash val="solid"/>
                     </a:lnT>
                     <a:lnB w="9525" cap="flat" cmpd="sng" algn="ctr">
                       <a:solidFill>
-                        <a:srgbClr val="D6E5EA"/>
+                        <a:srgbClr val="D5EEF6"/>
                       </a:solidFill>
                       <a:prstDash val="solid"/>
                     </a:lnB>
                     <a:solidFill>
-                      <a:srgbClr val="D6E5EA"/>
+                      <a:srgbClr val="D5EEF6"/>
                     </a:solidFill>
                   </a:tcPr>
                 </a:tc>
@@ -5973,7 +6698,7 @@
                       <a:r>
                         <a:rPr sz="1500" b="0">
                           <a:solidFill>
-                            <a:srgbClr val="2B2B2B"/>
+                            <a:srgbClr val="26231F"/>
                           </a:solidFill>
                         </a:rPr>
                         <a:t>내용 입력</a:t>
@@ -5983,25 +6708,25 @@
                   <a:tcPr anchor="ctr" marL="73152" marR="73152">
                     <a:lnL w="9525" cap="flat" cmpd="sng" algn="ctr">
                       <a:solidFill>
-                        <a:srgbClr val="D6E5EA"/>
+                        <a:srgbClr val="D5EEF6"/>
                       </a:solidFill>
                       <a:prstDash val="solid"/>
                     </a:lnL>
                     <a:lnR w="9525" cap="flat" cmpd="sng" algn="ctr">
                       <a:solidFill>
-                        <a:srgbClr val="D6E5EA"/>
+                        <a:srgbClr val="D5EEF6"/>
                       </a:solidFill>
                       <a:prstDash val="solid"/>
                     </a:lnR>
                     <a:lnT w="9525" cap="flat" cmpd="sng" algn="ctr">
                       <a:solidFill>
-                        <a:srgbClr val="D6E5EA"/>
+                        <a:srgbClr val="D5EEF6"/>
                       </a:solidFill>
                       <a:prstDash val="solid"/>
                     </a:lnT>
                     <a:lnB w="9525" cap="flat" cmpd="sng" algn="ctr">
                       <a:solidFill>
-                        <a:srgbClr val="D6E5EA"/>
+                        <a:srgbClr val="D5EEF6"/>
                       </a:solidFill>
                       <a:prstDash val="solid"/>
                     </a:lnB>
@@ -6019,7 +6744,7 @@
                       <a:r>
                         <a:rPr sz="1500" b="0">
                           <a:solidFill>
-                            <a:srgbClr val="2B2B2B"/>
+                            <a:srgbClr val="26231F"/>
                           </a:solidFill>
                         </a:rPr>
                         <a:t/>
@@ -6029,25 +6754,25 @@
                   <a:tcPr anchor="ctr" marL="73152" marR="73152">
                     <a:lnL w="9525" cap="flat" cmpd="sng" algn="ctr">
                       <a:solidFill>
-                        <a:srgbClr val="D6E5EA"/>
+                        <a:srgbClr val="D5EEF6"/>
                       </a:solidFill>
                       <a:prstDash val="solid"/>
                     </a:lnL>
                     <a:lnR w="9525" cap="flat" cmpd="sng" algn="ctr">
                       <a:solidFill>
-                        <a:srgbClr val="D6E5EA"/>
+                        <a:srgbClr val="D5EEF6"/>
                       </a:solidFill>
                       <a:prstDash val="solid"/>
                     </a:lnR>
                     <a:lnT w="9525" cap="flat" cmpd="sng" algn="ctr">
                       <a:solidFill>
-                        <a:srgbClr val="D6E5EA"/>
+                        <a:srgbClr val="D5EEF6"/>
                       </a:solidFill>
                       <a:prstDash val="solid"/>
                     </a:lnT>
                     <a:lnB w="9525" cap="flat" cmpd="sng" algn="ctr">
                       <a:solidFill>
-                        <a:srgbClr val="D6E5EA"/>
+                        <a:srgbClr val="D5EEF6"/>
                       </a:solidFill>
                       <a:prstDash val="solid"/>
                     </a:lnB>
@@ -6065,7 +6790,7 @@
                       <a:r>
                         <a:rPr sz="1500" b="0">
                           <a:solidFill>
-                            <a:srgbClr val="2B2B2B"/>
+                            <a:srgbClr val="26231F"/>
                           </a:solidFill>
                         </a:rPr>
                         <a:t/>
@@ -6075,25 +6800,25 @@
                   <a:tcPr anchor="ctr" marL="73152" marR="73152">
                     <a:lnL w="9525" cap="flat" cmpd="sng" algn="ctr">
                       <a:solidFill>
-                        <a:srgbClr val="D6E5EA"/>
+                        <a:srgbClr val="D5EEF6"/>
                       </a:solidFill>
                       <a:prstDash val="solid"/>
                     </a:lnL>
                     <a:lnR w="9525" cap="flat" cmpd="sng" algn="ctr">
                       <a:solidFill>
-                        <a:srgbClr val="D6E5EA"/>
+                        <a:srgbClr val="D5EEF6"/>
                       </a:solidFill>
                       <a:prstDash val="solid"/>
                     </a:lnR>
                     <a:lnT w="9525" cap="flat" cmpd="sng" algn="ctr">
                       <a:solidFill>
-                        <a:srgbClr val="D6E5EA"/>
+                        <a:srgbClr val="D5EEF6"/>
                       </a:solidFill>
                       <a:prstDash val="solid"/>
                     </a:lnT>
                     <a:lnB w="9525" cap="flat" cmpd="sng" algn="ctr">
                       <a:solidFill>
-                        <a:srgbClr val="D6E5EA"/>
+                        <a:srgbClr val="D5EEF6"/>
                       </a:solidFill>
                       <a:prstDash val="solid"/>
                     </a:lnB>
@@ -6113,7 +6838,7 @@
                       <a:r>
                         <a:rPr sz="1500" b="1">
                           <a:solidFill>
-                            <a:srgbClr val="253A41"/>
+                            <a:srgbClr val="274149"/>
                           </a:solidFill>
                         </a:rPr>
                         <a:t>4</a:t>
@@ -6123,30 +6848,30 @@
                   <a:tcPr anchor="ctr" marL="73152" marR="73152">
                     <a:lnL w="9525" cap="flat" cmpd="sng" algn="ctr">
                       <a:solidFill>
-                        <a:srgbClr val="D6E5EA"/>
+                        <a:srgbClr val="D5EEF6"/>
                       </a:solidFill>
                       <a:prstDash val="solid"/>
                     </a:lnL>
                     <a:lnR w="9525" cap="flat" cmpd="sng" algn="ctr">
                       <a:solidFill>
-                        <a:srgbClr val="D6E5EA"/>
+                        <a:srgbClr val="D5EEF6"/>
                       </a:solidFill>
                       <a:prstDash val="solid"/>
                     </a:lnR>
                     <a:lnT w="9525" cap="flat" cmpd="sng" algn="ctr">
                       <a:solidFill>
-                        <a:srgbClr val="D6E5EA"/>
+                        <a:srgbClr val="D5EEF6"/>
                       </a:solidFill>
                       <a:prstDash val="solid"/>
                     </a:lnT>
                     <a:lnB w="9525" cap="flat" cmpd="sng" algn="ctr">
                       <a:solidFill>
-                        <a:srgbClr val="D6E5EA"/>
+                        <a:srgbClr val="D5EEF6"/>
                       </a:solidFill>
                       <a:prstDash val="solid"/>
                     </a:lnB>
                     <a:solidFill>
-                      <a:srgbClr val="D6E5EA"/>
+                      <a:srgbClr val="D5EEF6"/>
                     </a:solidFill>
                   </a:tcPr>
                 </a:tc>
@@ -6159,7 +6884,7 @@
                       <a:r>
                         <a:rPr sz="1500" b="0">
                           <a:solidFill>
-                            <a:srgbClr val="2B2B2B"/>
+                            <a:srgbClr val="26231F"/>
                           </a:solidFill>
                         </a:rPr>
                         <a:t>내용 입력</a:t>
@@ -6169,30 +6894,30 @@
                   <a:tcPr anchor="ctr" marL="73152" marR="73152">
                     <a:lnL w="9525" cap="flat" cmpd="sng" algn="ctr">
                       <a:solidFill>
-                        <a:srgbClr val="D6E5EA"/>
+                        <a:srgbClr val="D5EEF6"/>
                       </a:solidFill>
                       <a:prstDash val="solid"/>
                     </a:lnL>
                     <a:lnR w="9525" cap="flat" cmpd="sng" algn="ctr">
                       <a:solidFill>
-                        <a:srgbClr val="D6E5EA"/>
+                        <a:srgbClr val="D5EEF6"/>
                       </a:solidFill>
                       <a:prstDash val="solid"/>
                     </a:lnR>
                     <a:lnT w="9525" cap="flat" cmpd="sng" algn="ctr">
                       <a:solidFill>
-                        <a:srgbClr val="D6E5EA"/>
+                        <a:srgbClr val="D5EEF6"/>
                       </a:solidFill>
                       <a:prstDash val="solid"/>
                     </a:lnT>
                     <a:lnB w="9525" cap="flat" cmpd="sng" algn="ctr">
                       <a:solidFill>
-                        <a:srgbClr val="D6E5EA"/>
+                        <a:srgbClr val="D5EEF6"/>
                       </a:solidFill>
                       <a:prstDash val="solid"/>
                     </a:lnB>
                     <a:solidFill>
-                      <a:srgbClr val="F2F6F8"/>
+                      <a:srgbClr val="ECF7FB"/>
                     </a:solidFill>
                   </a:tcPr>
                 </a:tc>
@@ -6205,7 +6930,7 @@
                       <a:r>
                         <a:rPr sz="1500" b="0">
                           <a:solidFill>
-                            <a:srgbClr val="2B2B2B"/>
+                            <a:srgbClr val="26231F"/>
                           </a:solidFill>
                         </a:rPr>
                         <a:t/>
@@ -6215,30 +6940,30 @@
                   <a:tcPr anchor="ctr" marL="73152" marR="73152">
                     <a:lnL w="9525" cap="flat" cmpd="sng" algn="ctr">
                       <a:solidFill>
-                        <a:srgbClr val="D6E5EA"/>
+                        <a:srgbClr val="D5EEF6"/>
                       </a:solidFill>
                       <a:prstDash val="solid"/>
                     </a:lnL>
                     <a:lnR w="9525" cap="flat" cmpd="sng" algn="ctr">
                       <a:solidFill>
-                        <a:srgbClr val="D6E5EA"/>
+                        <a:srgbClr val="D5EEF6"/>
                       </a:solidFill>
                       <a:prstDash val="solid"/>
                     </a:lnR>
                     <a:lnT w="9525" cap="flat" cmpd="sng" algn="ctr">
                       <a:solidFill>
-                        <a:srgbClr val="D6E5EA"/>
+                        <a:srgbClr val="D5EEF6"/>
                       </a:solidFill>
                       <a:prstDash val="solid"/>
                     </a:lnT>
                     <a:lnB w="9525" cap="flat" cmpd="sng" algn="ctr">
                       <a:solidFill>
-                        <a:srgbClr val="D6E5EA"/>
+                        <a:srgbClr val="D5EEF6"/>
                       </a:solidFill>
                       <a:prstDash val="solid"/>
                     </a:lnB>
                     <a:solidFill>
-                      <a:srgbClr val="F2F6F8"/>
+                      <a:srgbClr val="ECF7FB"/>
                     </a:solidFill>
                   </a:tcPr>
                 </a:tc>
@@ -6251,7 +6976,7 @@
                       <a:r>
                         <a:rPr sz="1500" b="0">
                           <a:solidFill>
-                            <a:srgbClr val="2B2B2B"/>
+                            <a:srgbClr val="26231F"/>
                           </a:solidFill>
                         </a:rPr>
                         <a:t/>
@@ -6261,30 +6986,30 @@
                   <a:tcPr anchor="ctr" marL="73152" marR="73152">
                     <a:lnL w="9525" cap="flat" cmpd="sng" algn="ctr">
                       <a:solidFill>
-                        <a:srgbClr val="D6E5EA"/>
+                        <a:srgbClr val="D5EEF6"/>
                       </a:solidFill>
                       <a:prstDash val="solid"/>
                     </a:lnL>
                     <a:lnR w="9525" cap="flat" cmpd="sng" algn="ctr">
                       <a:solidFill>
-                        <a:srgbClr val="D6E5EA"/>
+                        <a:srgbClr val="D5EEF6"/>
                       </a:solidFill>
                       <a:prstDash val="solid"/>
                     </a:lnR>
                     <a:lnT w="9525" cap="flat" cmpd="sng" algn="ctr">
                       <a:solidFill>
-                        <a:srgbClr val="D6E5EA"/>
+                        <a:srgbClr val="D5EEF6"/>
                       </a:solidFill>
                       <a:prstDash val="solid"/>
                     </a:lnT>
                     <a:lnB w="9525" cap="flat" cmpd="sng" algn="ctr">
                       <a:solidFill>
-                        <a:srgbClr val="D6E5EA"/>
+                        <a:srgbClr val="D5EEF6"/>
                       </a:solidFill>
                       <a:prstDash val="solid"/>
                     </a:lnB>
                     <a:solidFill>
-                      <a:srgbClr val="F2F6F8"/>
+                      <a:srgbClr val="ECF7FB"/>
                     </a:solidFill>
                   </a:tcPr>
                 </a:tc>
@@ -6299,7 +7024,7 @@
                       <a:r>
                         <a:rPr sz="1500" b="1">
                           <a:solidFill>
-                            <a:srgbClr val="253A41"/>
+                            <a:srgbClr val="274149"/>
                           </a:solidFill>
                         </a:rPr>
                         <a:t>5</a:t>
@@ -6309,30 +7034,30 @@
                   <a:tcPr anchor="ctr" marL="73152" marR="73152">
                     <a:lnL w="9525" cap="flat" cmpd="sng" algn="ctr">
                       <a:solidFill>
-                        <a:srgbClr val="D6E5EA"/>
+                        <a:srgbClr val="D5EEF6"/>
                       </a:solidFill>
                       <a:prstDash val="solid"/>
                     </a:lnL>
                     <a:lnR w="9525" cap="flat" cmpd="sng" algn="ctr">
                       <a:solidFill>
-                        <a:srgbClr val="D6E5EA"/>
+                        <a:srgbClr val="D5EEF6"/>
                       </a:solidFill>
                       <a:prstDash val="solid"/>
                     </a:lnR>
                     <a:lnT w="9525" cap="flat" cmpd="sng" algn="ctr">
                       <a:solidFill>
-                        <a:srgbClr val="D6E5EA"/>
+                        <a:srgbClr val="D5EEF6"/>
                       </a:solidFill>
                       <a:prstDash val="solid"/>
                     </a:lnT>
                     <a:lnB w="9525" cap="flat" cmpd="sng" algn="ctr">
                       <a:solidFill>
-                        <a:srgbClr val="D6E5EA"/>
+                        <a:srgbClr val="D5EEF6"/>
                       </a:solidFill>
                       <a:prstDash val="solid"/>
                     </a:lnB>
                     <a:solidFill>
-                      <a:srgbClr val="D6E5EA"/>
+                      <a:srgbClr val="D5EEF6"/>
                     </a:solidFill>
                   </a:tcPr>
                 </a:tc>
@@ -6345,7 +7070,7 @@
                       <a:r>
                         <a:rPr sz="1500" b="0">
                           <a:solidFill>
-                            <a:srgbClr val="2B2B2B"/>
+                            <a:srgbClr val="26231F"/>
                           </a:solidFill>
                         </a:rPr>
                         <a:t>내용 입력</a:t>
@@ -6355,25 +7080,25 @@
                   <a:tcPr anchor="ctr" marL="73152" marR="73152">
                     <a:lnL w="9525" cap="flat" cmpd="sng" algn="ctr">
                       <a:solidFill>
-                        <a:srgbClr val="D6E5EA"/>
+                        <a:srgbClr val="D5EEF6"/>
                       </a:solidFill>
                       <a:prstDash val="solid"/>
                     </a:lnL>
                     <a:lnR w="9525" cap="flat" cmpd="sng" algn="ctr">
                       <a:solidFill>
-                        <a:srgbClr val="D6E5EA"/>
+                        <a:srgbClr val="D5EEF6"/>
                       </a:solidFill>
                       <a:prstDash val="solid"/>
                     </a:lnR>
                     <a:lnT w="9525" cap="flat" cmpd="sng" algn="ctr">
                       <a:solidFill>
-                        <a:srgbClr val="D6E5EA"/>
+                        <a:srgbClr val="D5EEF6"/>
                       </a:solidFill>
                       <a:prstDash val="solid"/>
                     </a:lnT>
                     <a:lnB w="9525" cap="flat" cmpd="sng" algn="ctr">
                       <a:solidFill>
-                        <a:srgbClr val="D6E5EA"/>
+                        <a:srgbClr val="D5EEF6"/>
                       </a:solidFill>
                       <a:prstDash val="solid"/>
                     </a:lnB>
@@ -6391,7 +7116,7 @@
                       <a:r>
                         <a:rPr sz="1500" b="0">
                           <a:solidFill>
-                            <a:srgbClr val="2B2B2B"/>
+                            <a:srgbClr val="26231F"/>
                           </a:solidFill>
                         </a:rPr>
                         <a:t/>
@@ -6401,25 +7126,25 @@
                   <a:tcPr anchor="ctr" marL="73152" marR="73152">
                     <a:lnL w="9525" cap="flat" cmpd="sng" algn="ctr">
                       <a:solidFill>
-                        <a:srgbClr val="D6E5EA"/>
+                        <a:srgbClr val="D5EEF6"/>
                       </a:solidFill>
                       <a:prstDash val="solid"/>
                     </a:lnL>
                     <a:lnR w="9525" cap="flat" cmpd="sng" algn="ctr">
                       <a:solidFill>
-                        <a:srgbClr val="D6E5EA"/>
+                        <a:srgbClr val="D5EEF6"/>
                       </a:solidFill>
                       <a:prstDash val="solid"/>
                     </a:lnR>
                     <a:lnT w="9525" cap="flat" cmpd="sng" algn="ctr">
                       <a:solidFill>
-                        <a:srgbClr val="D6E5EA"/>
+                        <a:srgbClr val="D5EEF6"/>
                       </a:solidFill>
                       <a:prstDash val="solid"/>
                     </a:lnT>
                     <a:lnB w="9525" cap="flat" cmpd="sng" algn="ctr">
                       <a:solidFill>
-                        <a:srgbClr val="D6E5EA"/>
+                        <a:srgbClr val="D5EEF6"/>
                       </a:solidFill>
                       <a:prstDash val="solid"/>
                     </a:lnB>
@@ -6437,7 +7162,7 @@
                       <a:r>
                         <a:rPr sz="1500" b="0">
                           <a:solidFill>
-                            <a:srgbClr val="2B2B2B"/>
+                            <a:srgbClr val="26231F"/>
                           </a:solidFill>
                         </a:rPr>
                         <a:t/>
@@ -6447,25 +7172,25 @@
                   <a:tcPr anchor="ctr" marL="73152" marR="73152">
                     <a:lnL w="9525" cap="flat" cmpd="sng" algn="ctr">
                       <a:solidFill>
-                        <a:srgbClr val="D6E5EA"/>
+                        <a:srgbClr val="D5EEF6"/>
                       </a:solidFill>
                       <a:prstDash val="solid"/>
                     </a:lnL>
                     <a:lnR w="9525" cap="flat" cmpd="sng" algn="ctr">
                       <a:solidFill>
-                        <a:srgbClr val="D6E5EA"/>
+                        <a:srgbClr val="D5EEF6"/>
                       </a:solidFill>
                       <a:prstDash val="solid"/>
                     </a:lnR>
                     <a:lnT w="9525" cap="flat" cmpd="sng" algn="ctr">
                       <a:solidFill>
-                        <a:srgbClr val="D6E5EA"/>
+                        <a:srgbClr val="D5EEF6"/>
                       </a:solidFill>
                       <a:prstDash val="solid"/>
                     </a:lnT>
                     <a:lnB w="9525" cap="flat" cmpd="sng" algn="ctr">
                       <a:solidFill>
-                        <a:srgbClr val="D6E5EA"/>
+                        <a:srgbClr val="D5EEF6"/>
                       </a:solidFill>
                       <a:prstDash val="solid"/>
                     </a:lnB>
@@ -6490,6 +7215,14 @@
 <file path=ppt/slides/slide6.xml><?xml version="1.0" encoding="utf-8"?>
 <p:sld xmlns:a="http://schemas.openxmlformats.org/drawingml/2006/main" xmlns:p="http://schemas.openxmlformats.org/presentationml/2006/main" xmlns:r="http://schemas.openxmlformats.org/officeDocument/2006/relationships">
   <p:cSld>
+    <p:bg>
+      <p:bgPr>
+        <a:solidFill>
+          <a:srgbClr val="D5EEF6"/>
+        </a:solidFill>
+        <a:effectLst/>
+      </p:bgPr>
+    </p:bg>
     <p:spTree>
       <p:nvGrpSpPr>
         <p:cNvPr id="1" name=""/>
@@ -6497,30 +7230,102 @@
         <p:nvPr/>
       </p:nvGrpSpPr>
       <p:grpSpPr/>
-      <p:pic>
-        <p:nvPicPr>
-          <p:cNvPr id="3" name="표지 그림" descr="talk-46.jpg"/>
-          <p:cNvPicPr>
-            <a:picLocks noChangeAspect="1"/>
-          </p:cNvPicPr>
+      <p:sp>
+        <p:nvSpPr>
+          <p:cNvPr id="3" name="장식"/>
+          <p:cNvSpPr/>
           <p:nvPr/>
-        </p:nvPicPr>
-        <p:blipFill>
-          <a:blip r:embed="rId2"/>
-          <a:stretch>
-            <a:fillRect/>
-          </a:stretch>
-        </p:blipFill>
-        <p:spPr>
-          <a:xfrm>
-            <a:off x="0" y="0"/>
-            <a:ext cx="12191695" cy="6858000"/>
+        </p:nvSpPr>
+        <p:spPr>
+          <a:xfrm>
+            <a:off x="7071183" y="-3200400"/>
+            <a:ext cx="6400800" cy="6400800"/>
+          </a:xfrm>
+          <a:prstGeom prst="ellipse">
+            <a:avLst/>
+          </a:prstGeom>
+          <a:solidFill>
+            <a:srgbClr val="ADDBEB"/>
+          </a:solidFill>
+          <a:ln>
+            <a:noFill/>
+          </a:ln>
+        </p:spPr>
+        <p:txBody>
+          <a:bodyPr rtlCol="0" anchor="ctr"/>
+          <a:lstStyle/>
+          <a:p>
+            <a:pPr algn="ctr"/>
+          </a:p>
+        </p:txBody>
+      </p:sp>
+      <p:sp>
+        <p:nvSpPr>
+          <p:cNvPr id="4" name="장식"/>
+          <p:cNvSpPr/>
+          <p:nvPr/>
+        </p:nvSpPr>
+        <p:spPr>
+          <a:xfrm>
+            <a:off x="8534186" y="-914400"/>
+            <a:ext cx="3291840" cy="3291840"/>
+          </a:xfrm>
+          <a:prstGeom prst="ellipse">
+            <a:avLst/>
+          </a:prstGeom>
+          <a:solidFill>
+            <a:srgbClr val="FFFFFF"/>
+          </a:solidFill>
+          <a:ln>
+            <a:noFill/>
+          </a:ln>
+        </p:spPr>
+        <p:txBody>
+          <a:bodyPr rtlCol="0" anchor="ctr"/>
+          <a:lstStyle/>
+          <a:p>
+            <a:pPr algn="ctr"/>
+          </a:p>
+        </p:txBody>
+      </p:sp>
+      <p:sp>
+        <p:nvSpPr>
+          <p:cNvPr id="5" name="라벨"/>
+          <p:cNvSpPr txBox="1"/>
+          <p:nvPr/>
+        </p:nvSpPr>
+        <p:spPr>
+          <a:xfrm>
+            <a:off x="822960" y="2148840"/>
+            <a:ext cx="5608179" cy="274320"/>
           </a:xfrm>
           <a:prstGeom prst="rect">
             <a:avLst/>
           </a:prstGeom>
-        </p:spPr>
-      </p:pic>
+          <a:noFill/>
+        </p:spPr>
+        <p:txBody>
+          <a:bodyPr wrap="square" lIns="54864" rIns="54864" tIns="27432" bIns="27432" anchor="t">
+            <a:noAutofit/>
+          </a:bodyPr>
+          <a:lstStyle/>
+          <a:p>
+            <a:pPr algn="l">
+              <a:lnSpc>
+                <a:spcPct val="115000"/>
+              </a:lnSpc>
+            </a:pPr>
+            <a:r>
+              <a:rPr sz="1000" b="1" i="0" spc="250">
+                <a:solidFill>
+                  <a:srgbClr val="26231F"/>
+                </a:solidFill>
+              </a:rPr>
+              <a:t>PRESENTATION</a:t>
+            </a:r>
+          </a:p>
+        </p:txBody>
+      </p:sp>
       <p:sp>
         <p:nvSpPr>
           <p:cNvPr id="2" name="Title 1"/>
@@ -6533,8 +7338,8 @@
         </p:nvSpPr>
         <p:spPr>
           <a:xfrm>
-            <a:off x="853418" y="2057400"/>
-            <a:ext cx="6095847" cy="1554480"/>
+            <a:off x="822960" y="2606040"/>
+            <a:ext cx="5608179" cy="1188720"/>
           </a:xfrm>
         </p:spPr>
         <p:txBody>
@@ -6549,9 +7354,9 @@
               </a:lnSpc>
             </a:pPr>
             <a:r>
-              <a:rPr sz="3600" b="1" i="0">
+              <a:rPr sz="4000" b="1" i="0">
                 <a:solidFill>
-                  <a:srgbClr val="253A41"/>
+                  <a:srgbClr val="26231F"/>
                 </a:solidFill>
               </a:rPr>
               <a:t>감사합니다</a:t>
@@ -6561,14 +7366,14 @@
       </p:sp>
       <p:sp>
         <p:nvSpPr>
-          <p:cNvPr id="4" name="한 줄 문구"/>
+          <p:cNvPr id="6" name="한 줄 문구"/>
           <p:cNvSpPr txBox="1"/>
           <p:nvPr/>
         </p:nvSpPr>
         <p:spPr>
           <a:xfrm>
-            <a:off x="853418" y="3749039"/>
-            <a:ext cx="6095847" cy="822960"/>
+            <a:off x="822960" y="3886200"/>
+            <a:ext cx="5608179" cy="822960"/>
           </a:xfrm>
           <a:prstGeom prst="rect">
             <a:avLst/>
@@ -6587,9 +7392,9 @@
               </a:lnSpc>
             </a:pPr>
             <a:r>
-              <a:rPr sz="1700" b="0" i="1">
+              <a:rPr sz="1700" b="0" i="0">
                 <a:solidFill>
-                  <a:srgbClr val="253A41"/>
+                  <a:srgbClr val="26231F"/>
                 </a:solidFill>
               </a:rPr>
               <a:t>끝까지 들어 주셔서 고맙습니다</a:t>
@@ -6599,14 +7404,14 @@
       </p:sp>
       <p:sp>
         <p:nvSpPr>
-          <p:cNvPr id="5" name="안내 문구"/>
+          <p:cNvPr id="7" name="안내 문구"/>
           <p:cNvSpPr txBox="1"/>
           <p:nvPr/>
         </p:nvSpPr>
         <p:spPr>
           <a:xfrm>
-            <a:off x="853418" y="4617720"/>
-            <a:ext cx="6095847" cy="914400"/>
+            <a:off x="822960" y="4754880"/>
+            <a:ext cx="5608179" cy="914400"/>
           </a:xfrm>
           <a:prstGeom prst="rect">
             <a:avLst/>
@@ -6627,7 +7432,7 @@
             <a:r>
               <a:rPr sz="1400" b="0" i="0">
                 <a:solidFill>
-                  <a:srgbClr val="666666"/>
+                  <a:srgbClr val="26231F"/>
                 </a:solidFill>
               </a:rPr>
               <a:t>문의 · 연락처를 입력하세요</a:t>
@@ -6654,34 +7459,34 @@
         <a:sysClr val="window" lastClr="FFFFFF"/>
       </a:lt1>
       <a:dk2>
-        <a:srgbClr val="253A41"/>
+        <a:srgbClr val="274149"/>
       </a:dk2>
       <a:lt2>
-        <a:srgbClr val="F2F6F8"/>
+        <a:srgbClr val="ECF7FB"/>
       </a:lt2>
       <a:accent1>
-        <a:srgbClr val="497483"/>
+        <a:srgbClr val="98CFE1"/>
       </a:accent1>
       <a:accent2>
-        <a:srgbClr val="834958"/>
+        <a:srgbClr val="B8C6EA"/>
       </a:accent2>
       <a:accent3>
-        <a:srgbClr val="253A41"/>
+        <a:srgbClr val="274149"/>
       </a:accent3>
       <a:accent4>
-        <a:srgbClr val="D6E5EA"/>
+        <a:srgbClr val="D5EEF6"/>
       </a:accent4>
       <a:accent5>
-        <a:srgbClr val="665E6E"/>
+        <a:srgbClr val="A8CAE6"/>
       </a:accent5>
       <a:accent6>
-        <a:srgbClr val="7C898D"/>
+        <a:srgbClr val="7D8D92"/>
       </a:accent6>
       <a:hlink>
-        <a:srgbClr val="497483"/>
+        <a:srgbClr val="98CFE1"/>
       </a:hlink>
       <a:folHlink>
-        <a:srgbClr val="253A41"/>
+        <a:srgbClr val="274149"/>
       </a:folHlink>
     </a:clrScheme>
     <a:fontScheme name="Office">
